--- a/Презентация/АэроМонитор.pptx
+++ b/Презентация/АэроМонитор.pptx
@@ -10,6 +10,13 @@
     <p:sldId id="259" r:id="rId4"/>
     <p:sldId id="260" r:id="rId5"/>
     <p:sldId id="261" r:id="rId6"/>
+    <p:sldId id="262" r:id="rId7"/>
+    <p:sldId id="265" r:id="rId8"/>
+    <p:sldId id="264" r:id="rId9"/>
+    <p:sldId id="266" r:id="rId10"/>
+    <p:sldId id="267" r:id="rId11"/>
+    <p:sldId id="268" r:id="rId12"/>
+    <p:sldId id="270" r:id="rId13"/>
   </p:sldIdLst>
   <p:sldSz cx="12192000" cy="6858000"/>
   <p:notesSz cx="6858000" cy="9144000"/>
@@ -108,6 +115,11 @@
       </a:defRPr>
     </a:lvl9pPr>
   </p:defaultTextStyle>
+  <p:extLst>
+    <p:ext uri="{EFAFB233-063F-42B5-8137-9DF3F51BA10A}">
+      <p15:sldGuideLst xmlns:p15="http://schemas.microsoft.com/office/powerpoint/2012/main"/>
+    </p:ext>
+  </p:extLst>
 </p:presentation>
 </file>
 
@@ -336,7 +348,7 @@
             <a:fld id="{5586B75A-687E-405C-8A0B-8D00578BA2C3}" type="datetimeFigureOut">
               <a:rPr lang="en-US" dirty="0"/>
               <a:pPr/>
-              <a:t>4/13/2026</a:t>
+              <a:t>4/14/2026</a:t>
             </a:fld>
             <a:endParaRPr lang="en-US" dirty="0"/>
           </a:p>
@@ -503,7 +515,7 @@
             <a:fld id="{5586B75A-687E-405C-8A0B-8D00578BA2C3}" type="datetimeFigureOut">
               <a:rPr lang="en-US" dirty="0"/>
               <a:pPr/>
-              <a:t>4/13/2026</a:t>
+              <a:t>4/14/2026</a:t>
             </a:fld>
             <a:endParaRPr lang="en-US" dirty="0"/>
           </a:p>
@@ -680,7 +692,7 @@
             <a:fld id="{5586B75A-687E-405C-8A0B-8D00578BA2C3}" type="datetimeFigureOut">
               <a:rPr lang="en-US" dirty="0"/>
               <a:pPr/>
-              <a:t>4/13/2026</a:t>
+              <a:t>4/14/2026</a:t>
             </a:fld>
             <a:endParaRPr lang="en-US" dirty="0"/>
           </a:p>
@@ -847,7 +859,7 @@
             <a:fld id="{5586B75A-687E-405C-8A0B-8D00578BA2C3}" type="datetimeFigureOut">
               <a:rPr lang="en-US" dirty="0"/>
               <a:pPr/>
-              <a:t>4/13/2026</a:t>
+              <a:t>4/14/2026</a:t>
             </a:fld>
             <a:endParaRPr lang="en-US" dirty="0"/>
           </a:p>
@@ -1102,7 +1114,7 @@
             <a:fld id="{5586B75A-687E-405C-8A0B-8D00578BA2C3}" type="datetimeFigureOut">
               <a:rPr lang="en-US" dirty="0"/>
               <a:pPr/>
-              <a:t>4/13/2026</a:t>
+              <a:t>4/14/2026</a:t>
             </a:fld>
             <a:endParaRPr lang="en-US" dirty="0"/>
           </a:p>
@@ -1387,7 +1399,7 @@
             <a:fld id="{5586B75A-687E-405C-8A0B-8D00578BA2C3}" type="datetimeFigureOut">
               <a:rPr lang="en-US" dirty="0"/>
               <a:pPr/>
-              <a:t>4/13/2026</a:t>
+              <a:t>4/14/2026</a:t>
             </a:fld>
             <a:endParaRPr lang="en-US" dirty="0"/>
           </a:p>
@@ -1826,7 +1838,7 @@
             <a:fld id="{5586B75A-687E-405C-8A0B-8D00578BA2C3}" type="datetimeFigureOut">
               <a:rPr lang="en-US" dirty="0"/>
               <a:pPr/>
-              <a:t>4/13/2026</a:t>
+              <a:t>4/14/2026</a:t>
             </a:fld>
             <a:endParaRPr lang="en-US" dirty="0"/>
           </a:p>
@@ -1941,7 +1953,7 @@
             <a:fld id="{5586B75A-687E-405C-8A0B-8D00578BA2C3}" type="datetimeFigureOut">
               <a:rPr lang="en-US" dirty="0"/>
               <a:pPr/>
-              <a:t>4/13/2026</a:t>
+              <a:t>4/14/2026</a:t>
             </a:fld>
             <a:endParaRPr lang="en-US" dirty="0"/>
           </a:p>
@@ -2033,7 +2045,7 @@
             <a:fld id="{5586B75A-687E-405C-8A0B-8D00578BA2C3}" type="datetimeFigureOut">
               <a:rPr lang="en-US" dirty="0"/>
               <a:pPr/>
-              <a:t>4/13/2026</a:t>
+              <a:t>4/14/2026</a:t>
             </a:fld>
             <a:endParaRPr lang="en-US" dirty="0"/>
           </a:p>
@@ -2318,7 +2330,7 @@
             <a:fld id="{5586B75A-687E-405C-8A0B-8D00578BA2C3}" type="datetimeFigureOut">
               <a:rPr lang="en-US" dirty="0"/>
               <a:pPr/>
-              <a:t>4/13/2026</a:t>
+              <a:t>4/14/2026</a:t>
             </a:fld>
             <a:endParaRPr lang="en-US" dirty="0"/>
           </a:p>
@@ -2588,7 +2600,7 @@
             <a:fld id="{5586B75A-687E-405C-8A0B-8D00578BA2C3}" type="datetimeFigureOut">
               <a:rPr lang="en-US" dirty="0"/>
               <a:pPr/>
-              <a:t>4/13/2026</a:t>
+              <a:t>4/14/2026</a:t>
             </a:fld>
             <a:endParaRPr lang="en-US" dirty="0"/>
           </a:p>
@@ -2882,7 +2894,7 @@
             <a:fld id="{5586B75A-687E-405C-8A0B-8D00578BA2C3}" type="datetimeFigureOut">
               <a:rPr lang="en-US" dirty="0"/>
               <a:pPr/>
-              <a:t>4/13/2026</a:t>
+              <a:t>4/14/2026</a:t>
             </a:fld>
             <a:endParaRPr lang="en-US" dirty="0"/>
           </a:p>
@@ -3361,6 +3373,30 @@
           <a:chExt cx="0" cy="0"/>
         </a:xfrm>
       </p:grpSpPr>
+      <p:pic>
+        <p:nvPicPr>
+          <p:cNvPr id="4" name="Рисунок 3"/>
+          <p:cNvPicPr>
+            <a:picLocks noChangeAspect="1"/>
+          </p:cNvPicPr>
+          <p:nvPr/>
+        </p:nvPicPr>
+        <p:blipFill>
+          <a:blip r:embed="rId2"/>
+          <a:stretch>
+            <a:fillRect/>
+          </a:stretch>
+        </p:blipFill>
+        <p:spPr>
+          <a:xfrm>
+            <a:off x="1069848" y="1298448"/>
+            <a:ext cx="1522492" cy="1416185"/>
+          </a:xfrm>
+          <a:prstGeom prst="rect">
+            <a:avLst/>
+          </a:prstGeom>
+        </p:spPr>
+      </p:pic>
       <p:sp>
         <p:nvSpPr>
           <p:cNvPr id="2" name="Заголовок 1">
@@ -3383,13 +3419,18 @@
           <a:lstStyle/>
           <a:p>
             <a:r>
-              <a:rPr lang="ru-RU" dirty="0" err="1"/>
+              <a:rPr lang="ru-RU" dirty="0" smtClean="0">
+                <a:solidFill>
+                  <a:schemeClr val="bg1"/>
+                </a:solidFill>
+              </a:rPr>
               <a:t>АэроМонитор</a:t>
             </a:r>
             <a:r>
-              <a:rPr lang="ru-RU" dirty="0"/>
+              <a:rPr lang="ru-RU" dirty="0" smtClean="0"/>
               <a:t> </a:t>
             </a:r>
+            <a:endParaRPr lang="ru-RU" dirty="0"/>
           </a:p>
         </p:txBody>
       </p:sp>
@@ -3425,6 +3466,392 @@
     <p:extLst>
       <p:ext uri="{BB962C8B-B14F-4D97-AF65-F5344CB8AC3E}">
         <p14:creationId xmlns:p14="http://schemas.microsoft.com/office/powerpoint/2010/main" val="2879426519"/>
+      </p:ext>
+    </p:extLst>
+  </p:cSld>
+  <p:clrMapOvr>
+    <a:masterClrMapping/>
+  </p:clrMapOvr>
+</p:sld>
+</file>
+
+<file path=ppt/slides/slide10.xml><?xml version="1.0" encoding="utf-8"?>
+<p:sld xmlns:a="http://schemas.openxmlformats.org/drawingml/2006/main" xmlns:r="http://schemas.openxmlformats.org/officeDocument/2006/relationships" xmlns:p="http://schemas.openxmlformats.org/presentationml/2006/main">
+  <p:cSld>
+    <p:spTree>
+      <p:nvGrpSpPr>
+        <p:cNvPr id="1" name=""/>
+        <p:cNvGrpSpPr/>
+        <p:nvPr/>
+      </p:nvGrpSpPr>
+      <p:grpSpPr>
+        <a:xfrm>
+          <a:off x="0" y="0"/>
+          <a:ext cx="0" cy="0"/>
+          <a:chOff x="0" y="0"/>
+          <a:chExt cx="0" cy="0"/>
+        </a:xfrm>
+      </p:grpSpPr>
+      <p:sp>
+        <p:nvSpPr>
+          <p:cNvPr id="2" name="Заголовок 1">
+            <a:extLst>
+              <a:ext uri="{FF2B5EF4-FFF2-40B4-BE49-F238E27FC236}">
+                <a16:creationId xmlns:a16="http://schemas.microsoft.com/office/drawing/2014/main" id="{5EA56E4F-4593-F090-BAAA-15835B31863E}"/>
+              </a:ext>
+            </a:extLst>
+          </p:cNvPr>
+          <p:cNvSpPr>
+            <a:spLocks noGrp="1"/>
+          </p:cNvSpPr>
+          <p:nvPr>
+            <p:ph type="title" idx="4294967295"/>
+          </p:nvPr>
+        </p:nvSpPr>
+        <p:spPr>
+          <a:xfrm>
+            <a:off x="0" y="1123950"/>
+            <a:ext cx="3349625" cy="4600575"/>
+          </a:xfrm>
+        </p:spPr>
+        <p:txBody>
+          <a:bodyPr>
+            <a:normAutofit/>
+          </a:bodyPr>
+          <a:lstStyle/>
+          <a:p>
+            <a:r>
+              <a:rPr lang="ru-RU" sz="2800" dirty="0" smtClean="0"/>
+              <a:t>Примерная архитектура</a:t>
+            </a:r>
+            <a:endParaRPr lang="ru-RU" sz="2800" dirty="0"/>
+          </a:p>
+        </p:txBody>
+      </p:sp>
+      <p:pic>
+        <p:nvPicPr>
+          <p:cNvPr id="7" name="Рисунок 6"/>
+          <p:cNvPicPr>
+            <a:picLocks noChangeAspect="1"/>
+          </p:cNvPicPr>
+          <p:nvPr/>
+        </p:nvPicPr>
+        <p:blipFill>
+          <a:blip r:embed="rId2">
+            <a:extLst>
+              <a:ext uri="{28A0092B-C50C-407E-A947-70E740481C1C}">
+                <a14:useLocalDpi xmlns:a14="http://schemas.microsoft.com/office/drawing/2010/main" val="0"/>
+              </a:ext>
+            </a:extLst>
+          </a:blip>
+          <a:stretch>
+            <a:fillRect/>
+          </a:stretch>
+        </p:blipFill>
+        <p:spPr>
+          <a:xfrm>
+            <a:off x="1414057" y="1062933"/>
+            <a:ext cx="9134795" cy="5795067"/>
+          </a:xfrm>
+          <a:prstGeom prst="rect">
+            <a:avLst/>
+          </a:prstGeom>
+        </p:spPr>
+      </p:pic>
+      <p:sp>
+        <p:nvSpPr>
+          <p:cNvPr id="9" name="Заголовок 1">
+            <a:extLst>
+              <a:ext uri="{FF2B5EF4-FFF2-40B4-BE49-F238E27FC236}">
+                <a16:creationId xmlns:a16="http://schemas.microsoft.com/office/drawing/2014/main" id="{5EA56E4F-4593-F090-BAAA-15835B31863E}"/>
+              </a:ext>
+            </a:extLst>
+          </p:cNvPr>
+          <p:cNvSpPr txBox="1">
+            <a:spLocks/>
+          </p:cNvSpPr>
+          <p:nvPr/>
+        </p:nvSpPr>
+        <p:spPr>
+          <a:xfrm>
+            <a:off x="532014" y="349657"/>
+            <a:ext cx="10665230" cy="622932"/>
+          </a:xfrm>
+          <a:prstGeom prst="rect">
+            <a:avLst/>
+          </a:prstGeom>
+          <a:solidFill>
+            <a:schemeClr val="accent1"/>
+          </a:solidFill>
+        </p:spPr>
+        <p:txBody>
+          <a:bodyPr>
+            <a:normAutofit/>
+          </a:bodyPr>
+          <a:lstStyle>
+            <a:lvl1pPr algn="l" defTabSz="914400" rtl="0" eaLnBrk="1" latinLnBrk="0" hangingPunct="1">
+              <a:lnSpc>
+                <a:spcPct val="90000"/>
+              </a:lnSpc>
+              <a:spcBef>
+                <a:spcPct val="0"/>
+              </a:spcBef>
+              <a:buNone/>
+              <a:defRPr sz="3600" kern="1200" spc="-60" baseline="0">
+                <a:solidFill>
+                  <a:srgbClr val="FFFFFF"/>
+                </a:solidFill>
+                <a:latin typeface="+mj-lt"/>
+                <a:ea typeface="+mj-ea"/>
+                <a:cs typeface="+mj-cs"/>
+              </a:defRPr>
+            </a:lvl1pPr>
+          </a:lstStyle>
+          <a:p>
+            <a:r>
+              <a:rPr lang="ru-RU" sz="2800" dirty="0" smtClean="0"/>
+              <a:t>Примерная архитектура</a:t>
+            </a:r>
+            <a:endParaRPr lang="ru-RU" sz="2800" dirty="0"/>
+          </a:p>
+        </p:txBody>
+      </p:sp>
+    </p:spTree>
+    <p:extLst>
+      <p:ext uri="{BB962C8B-B14F-4D97-AF65-F5344CB8AC3E}">
+        <p14:creationId xmlns:p14="http://schemas.microsoft.com/office/powerpoint/2010/main" val="804820540"/>
+      </p:ext>
+    </p:extLst>
+  </p:cSld>
+  <p:clrMapOvr>
+    <a:masterClrMapping/>
+  </p:clrMapOvr>
+</p:sld>
+</file>
+
+<file path=ppt/slides/slide11.xml><?xml version="1.0" encoding="utf-8"?>
+<p:sld xmlns:a="http://schemas.openxmlformats.org/drawingml/2006/main" xmlns:r="http://schemas.openxmlformats.org/officeDocument/2006/relationships" xmlns:p="http://schemas.openxmlformats.org/presentationml/2006/main">
+  <p:cSld>
+    <p:spTree>
+      <p:nvGrpSpPr>
+        <p:cNvPr id="1" name=""/>
+        <p:cNvGrpSpPr/>
+        <p:nvPr/>
+      </p:nvGrpSpPr>
+      <p:grpSpPr>
+        <a:xfrm>
+          <a:off x="0" y="0"/>
+          <a:ext cx="0" cy="0"/>
+          <a:chOff x="0" y="0"/>
+          <a:chExt cx="0" cy="0"/>
+        </a:xfrm>
+      </p:grpSpPr>
+      <p:sp>
+        <p:nvSpPr>
+          <p:cNvPr id="2" name="Заголовок 1">
+            <a:extLst>
+              <a:ext uri="{FF2B5EF4-FFF2-40B4-BE49-F238E27FC236}">
+                <a16:creationId xmlns:a16="http://schemas.microsoft.com/office/drawing/2014/main" id="{5EA56E4F-4593-F090-BAAA-15835B31863E}"/>
+              </a:ext>
+            </a:extLst>
+          </p:cNvPr>
+          <p:cNvSpPr>
+            <a:spLocks noGrp="1"/>
+          </p:cNvSpPr>
+          <p:nvPr>
+            <p:ph type="title" idx="4294967295"/>
+          </p:nvPr>
+        </p:nvSpPr>
+        <p:spPr>
+          <a:xfrm>
+            <a:off x="0" y="1123950"/>
+            <a:ext cx="3349625" cy="4600575"/>
+          </a:xfrm>
+        </p:spPr>
+        <p:txBody>
+          <a:bodyPr>
+            <a:normAutofit/>
+          </a:bodyPr>
+          <a:lstStyle/>
+          <a:p>
+            <a:r>
+              <a:rPr lang="ru-RU" sz="2800" dirty="0" smtClean="0"/>
+              <a:t>Примерная архитектура</a:t>
+            </a:r>
+            <a:endParaRPr lang="ru-RU" sz="2800" dirty="0"/>
+          </a:p>
+        </p:txBody>
+      </p:sp>
+      <p:sp>
+        <p:nvSpPr>
+          <p:cNvPr id="9" name="Заголовок 1">
+            <a:extLst>
+              <a:ext uri="{FF2B5EF4-FFF2-40B4-BE49-F238E27FC236}">
+                <a16:creationId xmlns:a16="http://schemas.microsoft.com/office/drawing/2014/main" id="{5EA56E4F-4593-F090-BAAA-15835B31863E}"/>
+              </a:ext>
+            </a:extLst>
+          </p:cNvPr>
+          <p:cNvSpPr txBox="1">
+            <a:spLocks/>
+          </p:cNvSpPr>
+          <p:nvPr/>
+        </p:nvSpPr>
+        <p:spPr>
+          <a:xfrm>
+            <a:off x="532014" y="349657"/>
+            <a:ext cx="10665230" cy="622932"/>
+          </a:xfrm>
+          <a:prstGeom prst="rect">
+            <a:avLst/>
+          </a:prstGeom>
+          <a:solidFill>
+            <a:schemeClr val="accent1"/>
+          </a:solidFill>
+        </p:spPr>
+        <p:txBody>
+          <a:bodyPr>
+            <a:normAutofit/>
+          </a:bodyPr>
+          <a:lstStyle>
+            <a:lvl1pPr algn="l" defTabSz="914400" rtl="0" eaLnBrk="1" latinLnBrk="0" hangingPunct="1">
+              <a:lnSpc>
+                <a:spcPct val="90000"/>
+              </a:lnSpc>
+              <a:spcBef>
+                <a:spcPct val="0"/>
+              </a:spcBef>
+              <a:buNone/>
+              <a:defRPr sz="3600" kern="1200" spc="-60" baseline="0">
+                <a:solidFill>
+                  <a:srgbClr val="FFFFFF"/>
+                </a:solidFill>
+                <a:latin typeface="+mj-lt"/>
+                <a:ea typeface="+mj-ea"/>
+                <a:cs typeface="+mj-cs"/>
+              </a:defRPr>
+            </a:lvl1pPr>
+          </a:lstStyle>
+          <a:p>
+            <a:r>
+              <a:rPr lang="ru-RU" sz="2800" dirty="0" smtClean="0"/>
+              <a:t>Прототип  </a:t>
+            </a:r>
+            <a:r>
+              <a:rPr lang="en-US" sz="2800" dirty="0" smtClean="0"/>
+              <a:t>UI</a:t>
+            </a:r>
+            <a:endParaRPr lang="ru-RU" sz="2800" dirty="0"/>
+          </a:p>
+        </p:txBody>
+      </p:sp>
+    </p:spTree>
+    <p:extLst>
+      <p:ext uri="{BB962C8B-B14F-4D97-AF65-F5344CB8AC3E}">
+        <p14:creationId xmlns:p14="http://schemas.microsoft.com/office/powerpoint/2010/main" val="1499936774"/>
+      </p:ext>
+    </p:extLst>
+  </p:cSld>
+  <p:clrMapOvr>
+    <a:masterClrMapping/>
+  </p:clrMapOvr>
+</p:sld>
+</file>
+
+<file path=ppt/slides/slide12.xml><?xml version="1.0" encoding="utf-8"?>
+<p:sld xmlns:a="http://schemas.openxmlformats.org/drawingml/2006/main" xmlns:r="http://schemas.openxmlformats.org/officeDocument/2006/relationships" xmlns:p="http://schemas.openxmlformats.org/presentationml/2006/main">
+  <p:cSld>
+    <p:spTree>
+      <p:nvGrpSpPr>
+        <p:cNvPr id="1" name=""/>
+        <p:cNvGrpSpPr/>
+        <p:nvPr/>
+      </p:nvGrpSpPr>
+      <p:grpSpPr>
+        <a:xfrm>
+          <a:off x="0" y="0"/>
+          <a:ext cx="0" cy="0"/>
+          <a:chOff x="0" y="0"/>
+          <a:chExt cx="0" cy="0"/>
+        </a:xfrm>
+      </p:grpSpPr>
+      <p:sp>
+        <p:nvSpPr>
+          <p:cNvPr id="2" name="Заголовок 1">
+            <a:extLst>
+              <a:ext uri="{FF2B5EF4-FFF2-40B4-BE49-F238E27FC236}">
+                <a16:creationId xmlns:a16="http://schemas.microsoft.com/office/drawing/2014/main" id="{5EA56E4F-4593-F090-BAAA-15835B31863E}"/>
+              </a:ext>
+            </a:extLst>
+          </p:cNvPr>
+          <p:cNvSpPr>
+            <a:spLocks noGrp="1"/>
+          </p:cNvSpPr>
+          <p:nvPr>
+            <p:ph type="title"/>
+          </p:nvPr>
+        </p:nvSpPr>
+        <p:spPr>
+          <a:xfrm>
+            <a:off x="108065" y="1123837"/>
+            <a:ext cx="3350030" cy="4601183"/>
+          </a:xfrm>
+        </p:spPr>
+        <p:txBody>
+          <a:bodyPr>
+            <a:normAutofit/>
+          </a:bodyPr>
+          <a:lstStyle/>
+          <a:p>
+            <a:r>
+              <a:rPr lang="ru-RU" sz="2800" dirty="0" smtClean="0"/>
+              <a:t>Проблемы</a:t>
+            </a:r>
+            <a:endParaRPr lang="ru-RU" sz="2800" dirty="0"/>
+          </a:p>
+        </p:txBody>
+      </p:sp>
+      <p:sp>
+        <p:nvSpPr>
+          <p:cNvPr id="5" name="TextBox 4"/>
+          <p:cNvSpPr txBox="1"/>
+          <p:nvPr/>
+        </p:nvSpPr>
+        <p:spPr>
+          <a:xfrm>
+            <a:off x="3649287" y="872836"/>
+            <a:ext cx="7797338" cy="1477328"/>
+          </a:xfrm>
+          <a:prstGeom prst="rect">
+            <a:avLst/>
+          </a:prstGeom>
+          <a:noFill/>
+        </p:spPr>
+        <p:txBody>
+          <a:bodyPr wrap="square" rtlCol="0">
+            <a:spAutoFit/>
+          </a:bodyPr>
+          <a:lstStyle/>
+          <a:p>
+            <a:pPr marL="285750" indent="-285750">
+              <a:buFont typeface="Arial" panose="020B0604020202020204" pitchFamily="34" charset="0"/>
+              <a:buChar char="•"/>
+            </a:pPr>
+            <a:r>
+              <a:rPr lang="ru-RU" b="1" dirty="0" smtClean="0">
+                <a:latin typeface="Consolas" panose="020B0609020204030204" pitchFamily="49" charset="0"/>
+              </a:rPr>
+              <a:t>Где взять данные? Опытная эксплуатация и сбор данных с датчиков или случайная генерация с последующей классификацией на неразмеченных данных с привязкой к формуле связывающей все предикторы (стандарты ВОЗ, ГОСТ и др.)?</a:t>
+            </a:r>
+            <a:endParaRPr lang="ru-RU" sz="1600" dirty="0">
+              <a:latin typeface="YS Geo"/>
+            </a:endParaRPr>
+          </a:p>
+        </p:txBody>
+      </p:sp>
+    </p:spTree>
+    <p:extLst>
+      <p:ext uri="{BB962C8B-B14F-4D97-AF65-F5344CB8AC3E}">
+        <p14:creationId xmlns:p14="http://schemas.microsoft.com/office/powerpoint/2010/main" val="1679019135"/>
       </p:ext>
     </p:extLst>
   </p:cSld>
@@ -3925,17 +4352,49 @@
                 <a:effectLst/>
                 <a:latin typeface="YS Geo"/>
               </a:rPr>
-              <a:t> — преждевременный износ оборудования, частая замена фильтров, большие счета за </a:t>
-            </a:r>
-          </a:p>
-          <a:p>
-            <a:pPr algn="l"/>
+              <a:t> — преждевременный износ оборудования, частая замена фильтров, большие </a:t>
+            </a:r>
+            <a:r>
+              <a:rPr lang="ru-RU" sz="1600" b="0" i="0" dirty="0" smtClean="0">
+                <a:effectLst/>
+                <a:latin typeface="YS Geo"/>
+              </a:rPr>
+              <a:t>счета</a:t>
+            </a:r>
+            <a:r>
+              <a:rPr lang="en-US" sz="1600" b="0" i="0" dirty="0" smtClean="0">
+                <a:effectLst/>
+                <a:latin typeface="YS Geo"/>
+              </a:rPr>
+              <a:t> </a:t>
+            </a:r>
+            <a:r>
+              <a:rPr lang="ru-RU" sz="1600" b="0" i="0" dirty="0" smtClean="0">
+                <a:effectLst/>
+                <a:latin typeface="YS Geo"/>
+              </a:rPr>
+              <a:t>за</a:t>
+            </a:r>
             <a:r>
               <a:rPr lang="ru-RU" sz="1600" b="0" i="0" dirty="0">
                 <a:effectLst/>
                 <a:latin typeface="YS Geo"/>
               </a:rPr>
-              <a:t>электричество и отопление</a:t>
+              <a:t> </a:t>
+            </a:r>
+            <a:r>
+              <a:rPr lang="ru-RU" sz="1600" b="0" i="0" dirty="0" smtClean="0">
+                <a:effectLst/>
+                <a:latin typeface="YS Geo"/>
+              </a:rPr>
+              <a:t>электричество</a:t>
+            </a:r>
+            <a:r>
+              <a:rPr lang="ru-RU" sz="1600" b="0" i="0" dirty="0">
+                <a:effectLst/>
+                <a:latin typeface="YS Geo"/>
+              </a:rPr>
+              <a:t> и отопление</a:t>
             </a:r>
           </a:p>
           <a:p>
@@ -3999,17 +4458,35 @@
                 <a:effectLst/>
                 <a:latin typeface="YS Geo"/>
               </a:rPr>
-              <a:t> — неоптимальный режим работы снижает эффективность рекуперации, особенно в </a:t>
-            </a:r>
-          </a:p>
-          <a:p>
-            <a:pPr algn="l"/>
+              <a:t> — неоптимальный режим работы снижает эффективность рекуперации, особенно </a:t>
+            </a:r>
+            <a:r>
+              <a:rPr lang="ru-RU" sz="1600" b="0" i="0" dirty="0" smtClean="0">
+                <a:effectLst/>
+                <a:latin typeface="YS Geo"/>
+              </a:rPr>
+              <a:t>в</a:t>
+            </a:r>
+            <a:r>
+              <a:rPr lang="en-US" sz="1600" b="0" i="0" dirty="0" smtClean="0">
+                <a:effectLst/>
+                <a:latin typeface="YS Geo"/>
+              </a:rPr>
+              <a:t> </a:t>
+            </a:r>
+            <a:r>
+              <a:rPr lang="ru-RU" sz="1600" b="0" i="0" dirty="0" smtClean="0">
+                <a:effectLst/>
+                <a:latin typeface="YS Geo"/>
+              </a:rPr>
+              <a:t>холодное</a:t>
+            </a:r>
             <a:r>
               <a:rPr lang="ru-RU" sz="1600" b="0" i="0" dirty="0">
                 <a:effectLst/>
                 <a:latin typeface="YS Geo"/>
               </a:rPr>
-              <a:t>холодное время года.</a:t>
+              <a:t> время года.</a:t>
             </a:r>
           </a:p>
           <a:p>
@@ -4097,8 +4574,8 @@
         </p:blipFill>
         <p:spPr>
           <a:xfrm>
-            <a:off x="5063705" y="2309993"/>
-            <a:ext cx="6331789" cy="3738565"/>
+            <a:off x="5462715" y="2929424"/>
+            <a:ext cx="5909095" cy="3488988"/>
           </a:xfrm>
           <a:prstGeom prst="rect">
             <a:avLst/>
@@ -4119,8 +4596,8 @@
         </p:nvSpPr>
         <p:spPr>
           <a:xfrm>
-            <a:off x="3641738" y="681141"/>
-            <a:ext cx="5630067" cy="1200329"/>
+            <a:off x="3899433" y="2929424"/>
+            <a:ext cx="2031325" cy="938719"/>
           </a:xfrm>
           <a:prstGeom prst="rect">
             <a:avLst/>
@@ -4134,56 +4611,136 @@
           <a:lstStyle/>
           <a:p>
             <a:r>
-              <a:rPr lang="en-US" b="1" dirty="0">
+              <a:rPr lang="en-US" sz="1100" b="1" dirty="0">
                 <a:latin typeface="Consolas" panose="020B0609020204030204" pitchFamily="49" charset="0"/>
               </a:rPr>
               <a:t>Arduino</a:t>
             </a:r>
+            <a:r>
+              <a:rPr lang="ru-RU" sz="1100" b="1" dirty="0">
+                <a:latin typeface="Consolas" panose="020B0609020204030204" pitchFamily="49" charset="0"/>
+              </a:rPr>
+              <a:t> + </a:t>
+            </a:r>
+            <a:r>
+              <a:rPr lang="en-US" sz="1100" b="1" dirty="0">
+                <a:latin typeface="Consolas" panose="020B0609020204030204" pitchFamily="49" charset="0"/>
+              </a:rPr>
+              <a:t>Wi-Fi </a:t>
+            </a:r>
+            <a:r>
+              <a:rPr lang="ru-RU" sz="1100" b="1" dirty="0">
+                <a:latin typeface="Consolas" panose="020B0609020204030204" pitchFamily="49" charset="0"/>
+              </a:rPr>
+              <a:t>модуль</a:t>
+            </a:r>
+          </a:p>
+          <a:p>
+            <a:r>
+              <a:rPr lang="en-US" sz="1100" b="1" dirty="0">
+                <a:latin typeface="Consolas" panose="020B0609020204030204" pitchFamily="49" charset="0"/>
+              </a:rPr>
+              <a:t>WEB</a:t>
+            </a:r>
+            <a:r>
+              <a:rPr lang="ru-RU" sz="1100" b="1" dirty="0">
+                <a:latin typeface="Consolas" panose="020B0609020204030204" pitchFamily="49" charset="0"/>
+              </a:rPr>
+              <a:t> сервер с приложением</a:t>
+            </a:r>
+          </a:p>
+          <a:p>
+            <a:r>
+              <a:rPr lang="en-US" sz="1100" b="1" dirty="0">
+                <a:latin typeface="Consolas" panose="020B0609020204030204" pitchFamily="49" charset="0"/>
+              </a:rPr>
+              <a:t>ML</a:t>
+            </a:r>
+            <a:r>
+              <a:rPr lang="ru-RU" sz="1100" b="1" dirty="0">
+                <a:latin typeface="Consolas" panose="020B0609020204030204" pitchFamily="49" charset="0"/>
+              </a:rPr>
+              <a:t>-модель классификации</a:t>
+            </a:r>
+          </a:p>
+          <a:p>
+            <a:r>
+              <a:rPr lang="ru-RU" sz="1100" b="1" dirty="0">
+                <a:latin typeface="Consolas" panose="020B0609020204030204" pitchFamily="49" charset="0"/>
+              </a:rPr>
+              <a:t>Управление нагрузкой: </a:t>
+            </a:r>
+            <a:endParaRPr lang="ru-RU" sz="1100" b="1" dirty="0" smtClean="0">
+              <a:latin typeface="Consolas" panose="020B0609020204030204" pitchFamily="49" charset="0"/>
+            </a:endParaRPr>
+          </a:p>
+          <a:p>
+            <a:r>
+              <a:rPr lang="ru-RU" sz="1100" b="1" dirty="0" smtClean="0">
+                <a:latin typeface="Consolas" panose="020B0609020204030204" pitchFamily="49" charset="0"/>
+              </a:rPr>
+              <a:t>вентиляторы </a:t>
+            </a:r>
+            <a:r>
+              <a:rPr lang="ru-RU" sz="1100" b="1" dirty="0">
+                <a:latin typeface="Consolas" panose="020B0609020204030204" pitchFamily="49" charset="0"/>
+              </a:rPr>
+              <a:t>и клапаны</a:t>
+            </a:r>
+          </a:p>
+        </p:txBody>
+      </p:sp>
+      <p:sp>
+        <p:nvSpPr>
+          <p:cNvPr id="3" name="TextBox 2"/>
+          <p:cNvSpPr txBox="1"/>
+          <p:nvPr/>
+        </p:nvSpPr>
+        <p:spPr>
+          <a:xfrm>
+            <a:off x="3384044" y="773083"/>
+            <a:ext cx="9049272" cy="1754326"/>
+          </a:xfrm>
+          <a:prstGeom prst="rect">
+            <a:avLst/>
+          </a:prstGeom>
+          <a:noFill/>
+        </p:spPr>
+        <p:txBody>
+          <a:bodyPr wrap="none" rtlCol="0">
+            <a:spAutoFit/>
+          </a:bodyPr>
+          <a:lstStyle/>
+          <a:p>
             <a:r>
               <a:rPr lang="ru-RU" b="1" dirty="0">
                 <a:latin typeface="Consolas" panose="020B0609020204030204" pitchFamily="49" charset="0"/>
               </a:rPr>
-              <a:t> + </a:t>
-            </a:r>
-            <a:r>
-              <a:rPr lang="en-US" b="1" dirty="0">
-                <a:latin typeface="Consolas" panose="020B0609020204030204" pitchFamily="49" charset="0"/>
-              </a:rPr>
-              <a:t>Wi-Fi </a:t>
-            </a:r>
+              <a:t>Интеллектуальная, энергоэффективная система вентиляции на базе ML. </a:t>
+            </a:r>
+          </a:p>
+          <a:p>
             <a:r>
               <a:rPr lang="ru-RU" b="1" dirty="0">
                 <a:latin typeface="Consolas" panose="020B0609020204030204" pitchFamily="49" charset="0"/>
               </a:rPr>
-              <a:t>модуль</a:t>
-            </a:r>
-          </a:p>
-          <a:p>
-            <a:r>
-              <a:rPr lang="en-US" b="1" dirty="0">
-                <a:latin typeface="Consolas" panose="020B0609020204030204" pitchFamily="49" charset="0"/>
-              </a:rPr>
-              <a:t>WEB</a:t>
-            </a:r>
+              <a:t>Ключевые преимущества — экономия энергии и улучшение качества воздуха </a:t>
+            </a:r>
+          </a:p>
+          <a:p>
             <a:r>
               <a:rPr lang="ru-RU" b="1" dirty="0">
                 <a:latin typeface="Consolas" panose="020B0609020204030204" pitchFamily="49" charset="0"/>
               </a:rPr>
-              <a:t> сервер с приложением</a:t>
-            </a:r>
-          </a:p>
-          <a:p>
-            <a:r>
-              <a:rPr lang="en-US" b="1" dirty="0">
-                <a:latin typeface="Consolas" panose="020B0609020204030204" pitchFamily="49" charset="0"/>
-              </a:rPr>
-              <a:t>ML</a:t>
-            </a:r>
+              <a:t>за счёт точечного управления. </a:t>
+            </a:r>
+          </a:p>
+          <a:p>
             <a:r>
               <a:rPr lang="ru-RU" b="1" dirty="0">
                 <a:latin typeface="Consolas" panose="020B0609020204030204" pitchFamily="49" charset="0"/>
               </a:rPr>
-              <a:t>-модель классификации</a:t>
+              <a:t>Основные вызовы — калибровка датчиков и надёжность ML‑модели. </a:t>
             </a:r>
           </a:p>
           <a:p>
@@ -4191,7 +4748,15 @@
               <a:rPr lang="ru-RU" b="1" dirty="0">
                 <a:latin typeface="Consolas" panose="020B0609020204030204" pitchFamily="49" charset="0"/>
               </a:rPr>
-              <a:t>Управление нагрузкой: вентиляторы и клапаны</a:t>
+              <a:t>При грамотном проектировании и тестировании система окупается за счёт </a:t>
+            </a:r>
+          </a:p>
+          <a:p>
+            <a:r>
+              <a:rPr lang="ru-RU" b="1" dirty="0">
+                <a:latin typeface="Consolas" panose="020B0609020204030204" pitchFamily="49" charset="0"/>
+              </a:rPr>
+              <a:t>снижения энергопотребления и повышения комфорта/безопасности в здании</a:t>
             </a:r>
           </a:p>
         </p:txBody>
@@ -4242,38 +4807,164 @@
             <p:ph type="title"/>
           </p:nvPr>
         </p:nvSpPr>
-        <p:spPr/>
-        <p:txBody>
-          <a:bodyPr/>
-          <a:lstStyle/>
-          <a:p>
-            <a:r>
-              <a:rPr lang="ru-RU" dirty="0" err="1"/>
-              <a:t>Стэк</a:t>
-            </a:r>
-            <a:r>
-              <a:rPr lang="ru-RU" dirty="0"/>
-              <a:t> технологий</a:t>
-            </a:r>
-          </a:p>
-        </p:txBody>
-      </p:sp>
-      <p:sp>
-        <p:nvSpPr>
-          <p:cNvPr id="7" name="TextBox 6">
+        <p:spPr>
+          <a:xfrm>
+            <a:off x="108065" y="1123837"/>
+            <a:ext cx="3350030" cy="4601183"/>
+          </a:xfrm>
+        </p:spPr>
+        <p:txBody>
+          <a:bodyPr>
+            <a:normAutofit/>
+          </a:bodyPr>
+          <a:lstStyle/>
+          <a:p>
+            <a:r>
+              <a:rPr lang="ru-RU" sz="2800" dirty="0"/>
+              <a:t>Как датчики </a:t>
+            </a:r>
+            <a:r>
+              <a:rPr lang="ru-RU" sz="2800" dirty="0" smtClean="0"/>
+              <a:t/>
+            </a:r>
+            <a:br>
+              <a:rPr lang="ru-RU" sz="2800" dirty="0" smtClean="0"/>
+            </a:br>
+            <a:r>
+              <a:rPr lang="ru-RU" sz="2800" dirty="0" smtClean="0"/>
+              <a:t>превращаются</a:t>
+            </a:r>
+            <a:r>
+              <a:rPr lang="ru-RU" sz="2800" dirty="0"/>
+              <a:t> </a:t>
+            </a:r>
+            <a:r>
+              <a:rPr lang="ru-RU" sz="2800" dirty="0" smtClean="0"/>
+              <a:t>в</a:t>
+            </a:r>
+            <a:r>
+              <a:rPr lang="ru-RU" sz="2800" dirty="0"/>
+              <a:t> </a:t>
+            </a:r>
+            <a:r>
+              <a:rPr lang="ru-RU" sz="2800" dirty="0" smtClean="0"/>
+              <a:t/>
+            </a:r>
+            <a:br>
+              <a:rPr lang="ru-RU" sz="2800" dirty="0" smtClean="0"/>
+            </a:br>
+            <a:r>
+              <a:rPr lang="ru-RU" sz="2800" dirty="0" smtClean="0"/>
+              <a:t>интеллект</a:t>
+            </a:r>
+            <a:r>
+              <a:rPr lang="ru-RU" sz="2800" dirty="0"/>
+              <a:t>: признаки для модели качества воздуха</a:t>
+            </a:r>
+            <a:endParaRPr lang="ru-RU" sz="2800" dirty="0"/>
+          </a:p>
+        </p:txBody>
+      </p:sp>
+      <p:pic>
+        <p:nvPicPr>
+          <p:cNvPr id="3" name="Рисунок 2"/>
+          <p:cNvPicPr>
+            <a:picLocks noChangeAspect="1"/>
+          </p:cNvPicPr>
+          <p:nvPr/>
+        </p:nvPicPr>
+        <p:blipFill>
+          <a:blip r:embed="rId2"/>
+          <a:stretch>
+            <a:fillRect/>
+          </a:stretch>
+        </p:blipFill>
+        <p:spPr>
+          <a:xfrm>
+            <a:off x="3458095" y="632546"/>
+            <a:ext cx="8617527" cy="5583764"/>
+          </a:xfrm>
+          <a:prstGeom prst="rect">
+            <a:avLst/>
+          </a:prstGeom>
+        </p:spPr>
+      </p:pic>
+    </p:spTree>
+    <p:extLst>
+      <p:ext uri="{BB962C8B-B14F-4D97-AF65-F5344CB8AC3E}">
+        <p14:creationId xmlns:p14="http://schemas.microsoft.com/office/powerpoint/2010/main" val="3292945454"/>
+      </p:ext>
+    </p:extLst>
+  </p:cSld>
+  <p:clrMapOvr>
+    <a:masterClrMapping/>
+  </p:clrMapOvr>
+</p:sld>
+</file>
+
+<file path=ppt/slides/slide6.xml><?xml version="1.0" encoding="utf-8"?>
+<p:sld xmlns:a="http://schemas.openxmlformats.org/drawingml/2006/main" xmlns:r="http://schemas.openxmlformats.org/officeDocument/2006/relationships" xmlns:p="http://schemas.openxmlformats.org/presentationml/2006/main">
+  <p:cSld>
+    <p:spTree>
+      <p:nvGrpSpPr>
+        <p:cNvPr id="1" name=""/>
+        <p:cNvGrpSpPr/>
+        <p:nvPr/>
+      </p:nvGrpSpPr>
+      <p:grpSpPr>
+        <a:xfrm>
+          <a:off x="0" y="0"/>
+          <a:ext cx="0" cy="0"/>
+          <a:chOff x="0" y="0"/>
+          <a:chExt cx="0" cy="0"/>
+        </a:xfrm>
+      </p:grpSpPr>
+      <p:sp>
+        <p:nvSpPr>
+          <p:cNvPr id="2" name="Заголовок 1">
             <a:extLst>
               <a:ext uri="{FF2B5EF4-FFF2-40B4-BE49-F238E27FC236}">
-                <a16:creationId xmlns:a16="http://schemas.microsoft.com/office/drawing/2014/main" id="{31DC7550-D225-85C3-EB52-361ABC3EA0BE}"/>
+                <a16:creationId xmlns:a16="http://schemas.microsoft.com/office/drawing/2014/main" id="{5EA56E4F-4593-F090-BAAA-15835B31863E}"/>
               </a:ext>
             </a:extLst>
           </p:cNvPr>
+          <p:cNvSpPr>
+            <a:spLocks noGrp="1"/>
+          </p:cNvSpPr>
+          <p:nvPr>
+            <p:ph type="title"/>
+          </p:nvPr>
+        </p:nvSpPr>
+        <p:spPr>
+          <a:xfrm>
+            <a:off x="108065" y="1123837"/>
+            <a:ext cx="3350030" cy="4601183"/>
+          </a:xfrm>
+        </p:spPr>
+        <p:txBody>
+          <a:bodyPr>
+            <a:normAutofit/>
+          </a:bodyPr>
+          <a:lstStyle/>
+          <a:p>
+            <a:r>
+              <a:rPr lang="ru-RU" sz="2800" dirty="0" smtClean="0"/>
+              <a:t>Ключевые моменты</a:t>
+            </a:r>
+            <a:endParaRPr lang="ru-RU" sz="2800" dirty="0"/>
+          </a:p>
+        </p:txBody>
+      </p:sp>
+      <p:sp>
+        <p:nvSpPr>
+          <p:cNvPr id="4" name="TextBox 3"/>
           <p:cNvSpPr txBox="1"/>
           <p:nvPr/>
         </p:nvSpPr>
         <p:spPr>
           <a:xfrm>
-            <a:off x="3641738" y="681141"/>
-            <a:ext cx="5630067" cy="1200329"/>
+            <a:off x="3649287" y="872836"/>
+            <a:ext cx="7797338" cy="861774"/>
           </a:xfrm>
           <a:prstGeom prst="rect">
             <a:avLst/>
@@ -4281,78 +4972,1124 @@
           <a:noFill/>
         </p:spPr>
         <p:txBody>
-          <a:bodyPr wrap="none" rtlCol="0">
+          <a:bodyPr wrap="square" rtlCol="0">
             <a:spAutoFit/>
           </a:bodyPr>
           <a:lstStyle/>
           <a:p>
-            <a:r>
-              <a:rPr lang="en-US" b="1" dirty="0">
-                <a:latin typeface="Consolas" panose="020B0609020204030204" pitchFamily="49" charset="0"/>
-              </a:rPr>
-              <a:t>Arduino</a:t>
-            </a:r>
+            <a:pPr marL="285750" indent="-285750">
+              <a:buFont typeface="Arial" panose="020B0604020202020204" pitchFamily="34" charset="0"/>
+              <a:buChar char="•"/>
+            </a:pPr>
             <a:r>
               <a:rPr lang="ru-RU" b="1" dirty="0">
                 <a:latin typeface="Consolas" panose="020B0609020204030204" pitchFamily="49" charset="0"/>
               </a:rPr>
-              <a:t> + </a:t>
-            </a:r>
-            <a:r>
-              <a:rPr lang="en-US" b="1" dirty="0">
-                <a:latin typeface="Consolas" panose="020B0609020204030204" pitchFamily="49" charset="0"/>
-              </a:rPr>
-              <a:t>Wi-Fi </a:t>
-            </a:r>
+              <a:t>На вход </a:t>
+            </a:r>
+            <a:r>
+              <a:rPr lang="ru-RU" sz="1600" dirty="0">
+                <a:latin typeface="YS Geo"/>
+              </a:rPr>
+              <a:t>системы поступают показания с датчиков, дни </a:t>
+            </a:r>
+            <a:r>
+              <a:rPr lang="ru-RU" sz="1600" dirty="0">
+                <a:latin typeface="YS Geo"/>
+              </a:rPr>
+              <a:t>недели, признак </a:t>
+            </a:r>
+            <a:r>
+              <a:rPr lang="ru-RU" sz="1600" dirty="0">
+                <a:latin typeface="YS Geo"/>
+              </a:rPr>
+              <a:t>состояния </a:t>
+            </a:r>
+            <a:r>
+              <a:rPr lang="ru-RU" sz="1600" dirty="0">
+                <a:latin typeface="YS Geo"/>
+              </a:rPr>
+              <a:t>клапана, время суток, сезон, занятость помещения, температура и влажность с уличных датчиков</a:t>
+            </a:r>
+            <a:endParaRPr lang="ru-RU" sz="1600" dirty="0">
+              <a:latin typeface="YS Geo"/>
+            </a:endParaRPr>
+          </a:p>
+        </p:txBody>
+      </p:sp>
+      <p:sp>
+        <p:nvSpPr>
+          <p:cNvPr id="5" name="TextBox 4"/>
+          <p:cNvSpPr txBox="1"/>
+          <p:nvPr/>
+        </p:nvSpPr>
+        <p:spPr>
+          <a:xfrm>
+            <a:off x="3649287" y="1703833"/>
+            <a:ext cx="7797338" cy="615553"/>
+          </a:xfrm>
+          <a:prstGeom prst="rect">
+            <a:avLst/>
+          </a:prstGeom>
+          <a:noFill/>
+        </p:spPr>
+        <p:txBody>
+          <a:bodyPr wrap="square" rtlCol="0">
+            <a:spAutoFit/>
+          </a:bodyPr>
+          <a:lstStyle/>
+          <a:p>
+            <a:pPr marL="285750" indent="-285750">
+              <a:buFont typeface="Arial" panose="020B0604020202020204" pitchFamily="34" charset="0"/>
+              <a:buChar char="•"/>
+            </a:pPr>
             <a:r>
               <a:rPr lang="ru-RU" b="1" dirty="0">
                 <a:latin typeface="Consolas" panose="020B0609020204030204" pitchFamily="49" charset="0"/>
               </a:rPr>
-              <a:t>модуль</a:t>
-            </a:r>
-          </a:p>
-          <a:p>
-            <a:r>
-              <a:rPr lang="en-US" b="1" dirty="0">
-                <a:latin typeface="Consolas" panose="020B0609020204030204" pitchFamily="49" charset="0"/>
-              </a:rPr>
-              <a:t>WEB</a:t>
-            </a:r>
+              <a:t>На выходе </a:t>
+            </a:r>
+            <a:r>
+              <a:rPr lang="ru-RU" sz="1600" dirty="0">
+                <a:latin typeface="YS Geo"/>
+              </a:rPr>
+              <a:t>имеем класс качества воздуха </a:t>
+            </a:r>
+            <a:r>
+              <a:rPr lang="en-US" sz="1600" dirty="0">
+                <a:latin typeface="YS Geo"/>
+              </a:rPr>
+              <a:t>AQI</a:t>
+            </a:r>
+            <a:r>
+              <a:rPr lang="ru-RU" sz="1600" dirty="0">
+                <a:latin typeface="YS Geo"/>
+              </a:rPr>
+              <a:t>, по которому определяем какой клапан открыть</a:t>
+            </a:r>
+            <a:r>
+              <a:rPr lang="ru-RU" sz="1600" dirty="0">
+                <a:latin typeface="YS Geo"/>
+              </a:rPr>
+              <a:t>,</a:t>
+            </a:r>
+            <a:r>
+              <a:rPr lang="ru-RU" sz="1600" dirty="0">
+                <a:latin typeface="YS Geo"/>
+              </a:rPr>
+              <a:t> включить двигатели вентиляторов</a:t>
+            </a:r>
+            <a:endParaRPr lang="ru-RU" sz="1600" dirty="0">
+              <a:latin typeface="YS Geo"/>
+            </a:endParaRPr>
+          </a:p>
+        </p:txBody>
+      </p:sp>
+      <p:sp>
+        <p:nvSpPr>
+          <p:cNvPr id="7" name="TextBox 6"/>
+          <p:cNvSpPr txBox="1"/>
+          <p:nvPr/>
+        </p:nvSpPr>
+        <p:spPr>
+          <a:xfrm>
+            <a:off x="3649286" y="2319386"/>
+            <a:ext cx="7797339" cy="923330"/>
+          </a:xfrm>
+          <a:prstGeom prst="rect">
+            <a:avLst/>
+          </a:prstGeom>
+          <a:noFill/>
+        </p:spPr>
+        <p:txBody>
+          <a:bodyPr wrap="square" rtlCol="0">
+            <a:spAutoFit/>
+          </a:bodyPr>
+          <a:lstStyle/>
+          <a:p>
+            <a:pPr marL="285750" indent="-285750">
+              <a:buFont typeface="Arial" panose="020B0604020202020204" pitchFamily="34" charset="0"/>
+              <a:buChar char="•"/>
+            </a:pPr>
             <a:r>
               <a:rPr lang="ru-RU" b="1" dirty="0">
                 <a:latin typeface="Consolas" panose="020B0609020204030204" pitchFamily="49" charset="0"/>
               </a:rPr>
-              <a:t> сервер с приложением</a:t>
-            </a:r>
-          </a:p>
-          <a:p>
-            <a:r>
-              <a:rPr lang="en-US" b="1" dirty="0">
-                <a:latin typeface="Consolas" panose="020B0609020204030204" pitchFamily="49" charset="0"/>
-              </a:rPr>
+              <a:t>Экономия энергии:</a:t>
+            </a:r>
+            <a:r>
+              <a:rPr lang="ru-RU" dirty="0"/>
+              <a:t> вентиляция работает только там, где </a:t>
+            </a:r>
+            <a:r>
+              <a:rPr lang="ru-RU" dirty="0" smtClean="0"/>
+              <a:t>нужно</a:t>
+            </a:r>
+            <a:r>
+              <a:rPr lang="ru-RU" dirty="0"/>
+              <a:t>, </a:t>
+            </a:r>
+            <a:r>
+              <a:rPr lang="ru-RU" dirty="0" smtClean="0"/>
+              <a:t>и когда нужно, а</a:t>
+            </a:r>
+            <a:r>
+              <a:rPr lang="ru-RU" dirty="0"/>
+              <a:t> не </a:t>
+            </a:r>
+            <a:r>
+              <a:rPr lang="ru-RU" dirty="0" smtClean="0"/>
+              <a:t>постоянно и во всех помещениях. Актуально в крупных зданиях, где нагрузки 10-100 КВт </a:t>
+            </a:r>
+            <a:endParaRPr lang="ru-RU" sz="1600" dirty="0">
+              <a:latin typeface="YS Geo"/>
+            </a:endParaRPr>
+          </a:p>
+        </p:txBody>
+      </p:sp>
+      <p:sp>
+        <p:nvSpPr>
+          <p:cNvPr id="9" name="TextBox 8"/>
+          <p:cNvSpPr txBox="1"/>
+          <p:nvPr/>
+        </p:nvSpPr>
+        <p:spPr>
+          <a:xfrm>
+            <a:off x="3649285" y="3198703"/>
+            <a:ext cx="7797340" cy="646331"/>
+          </a:xfrm>
+          <a:prstGeom prst="rect">
+            <a:avLst/>
+          </a:prstGeom>
+          <a:noFill/>
+        </p:spPr>
+        <p:txBody>
+          <a:bodyPr wrap="square" rtlCol="0">
+            <a:spAutoFit/>
+          </a:bodyPr>
+          <a:lstStyle/>
+          <a:p>
+            <a:pPr marL="285750" indent="-285750">
+              <a:buFont typeface="Arial" panose="020B0604020202020204" pitchFamily="34" charset="0"/>
+              <a:buChar char="•"/>
+            </a:pPr>
+            <a:r>
+              <a:rPr lang="ru-RU" b="1" dirty="0"/>
+              <a:t>Улучшение качества воздуха:</a:t>
+            </a:r>
+            <a:r>
+              <a:rPr lang="ru-RU" dirty="0"/>
+              <a:t> оперативное реагирование на ухудшение параметров</a:t>
+            </a:r>
+            <a:endParaRPr lang="ru-RU" sz="1600" dirty="0">
+              <a:latin typeface="YS Geo"/>
+            </a:endParaRPr>
+          </a:p>
+        </p:txBody>
+      </p:sp>
+      <p:sp>
+        <p:nvSpPr>
+          <p:cNvPr id="11" name="TextBox 10"/>
+          <p:cNvSpPr txBox="1"/>
+          <p:nvPr/>
+        </p:nvSpPr>
+        <p:spPr>
+          <a:xfrm>
+            <a:off x="3649285" y="3817763"/>
+            <a:ext cx="7797340" cy="646331"/>
+          </a:xfrm>
+          <a:prstGeom prst="rect">
+            <a:avLst/>
+          </a:prstGeom>
+          <a:noFill/>
+        </p:spPr>
+        <p:txBody>
+          <a:bodyPr wrap="square" rtlCol="0">
+            <a:spAutoFit/>
+          </a:bodyPr>
+          <a:lstStyle/>
+          <a:p>
+            <a:pPr marL="285750" indent="-285750">
+              <a:buFont typeface="Arial" panose="020B0604020202020204" pitchFamily="34" charset="0"/>
+              <a:buChar char="•"/>
+            </a:pPr>
+            <a:r>
+              <a:rPr lang="ru-RU" b="1" dirty="0"/>
+              <a:t>Автоматизация:</a:t>
+            </a:r>
+            <a:r>
+              <a:rPr lang="ru-RU" dirty="0"/>
+              <a:t> минимизация ручного управления, снижение нагрузки на персонал</a:t>
+            </a:r>
+            <a:endParaRPr lang="ru-RU" sz="1600" dirty="0">
+              <a:latin typeface="YS Geo"/>
+            </a:endParaRPr>
+          </a:p>
+        </p:txBody>
+      </p:sp>
+      <p:sp>
+        <p:nvSpPr>
+          <p:cNvPr id="12" name="TextBox 11"/>
+          <p:cNvSpPr txBox="1"/>
+          <p:nvPr/>
+        </p:nvSpPr>
+        <p:spPr>
+          <a:xfrm>
+            <a:off x="3649285" y="4426303"/>
+            <a:ext cx="7797340" cy="646331"/>
+          </a:xfrm>
+          <a:prstGeom prst="rect">
+            <a:avLst/>
+          </a:prstGeom>
+          <a:noFill/>
+        </p:spPr>
+        <p:txBody>
+          <a:bodyPr wrap="square" rtlCol="0">
+            <a:spAutoFit/>
+          </a:bodyPr>
+          <a:lstStyle/>
+          <a:p>
+            <a:pPr marL="285750" indent="-285750">
+              <a:buFont typeface="Arial" panose="020B0604020202020204" pitchFamily="34" charset="0"/>
+              <a:buChar char="•"/>
+            </a:pPr>
+            <a:r>
+              <a:rPr lang="ru-RU" b="1" dirty="0"/>
+              <a:t>Прогнозирование:</a:t>
+            </a:r>
+            <a:r>
+              <a:rPr lang="ru-RU" dirty="0"/>
+              <a:t> ML‑модель может выявлять тренды и предупреждать о возможном ухудшении воздуха.</a:t>
+            </a:r>
+          </a:p>
+        </p:txBody>
+      </p:sp>
+      <p:sp>
+        <p:nvSpPr>
+          <p:cNvPr id="14" name="TextBox 13"/>
+          <p:cNvSpPr txBox="1"/>
+          <p:nvPr/>
+        </p:nvSpPr>
+        <p:spPr>
+          <a:xfrm>
+            <a:off x="3649285" y="5079647"/>
+            <a:ext cx="7797340" cy="923330"/>
+          </a:xfrm>
+          <a:prstGeom prst="rect">
+            <a:avLst/>
+          </a:prstGeom>
+          <a:noFill/>
+        </p:spPr>
+        <p:txBody>
+          <a:bodyPr wrap="square" rtlCol="0">
+            <a:spAutoFit/>
+          </a:bodyPr>
+          <a:lstStyle/>
+          <a:p>
+            <a:pPr marL="285750" indent="-285750">
+              <a:buFont typeface="Arial" panose="020B0604020202020204" pitchFamily="34" charset="0"/>
+              <a:buChar char="•"/>
+            </a:pPr>
+            <a:r>
+              <a:rPr lang="ru-RU" b="1" dirty="0" smtClean="0"/>
+              <a:t>Минусы:</a:t>
+            </a:r>
+            <a:r>
+              <a:rPr lang="ru-RU" dirty="0"/>
+              <a:t> </a:t>
+            </a:r>
+            <a:r>
+              <a:rPr lang="ru-RU" dirty="0" smtClean="0"/>
+              <a:t>зависимость от </a:t>
+            </a:r>
+            <a:r>
+              <a:rPr lang="en-US" dirty="0" smtClean="0"/>
               <a:t>ML</a:t>
             </a:r>
             <a:r>
-              <a:rPr lang="ru-RU" b="1" dirty="0">
-                <a:latin typeface="Consolas" panose="020B0609020204030204" pitchFamily="49" charset="0"/>
-              </a:rPr>
-              <a:t>-модель классификации</a:t>
-            </a:r>
-          </a:p>
-          <a:p>
-            <a:r>
-              <a:rPr lang="ru-RU" b="1" dirty="0">
-                <a:latin typeface="Consolas" panose="020B0609020204030204" pitchFamily="49" charset="0"/>
-              </a:rPr>
-              <a:t>Управление нагрузкой: вентиляторы и клапаны</a:t>
-            </a:r>
+              <a:rPr lang="ru-RU" dirty="0" smtClean="0"/>
+              <a:t>, калибровка датчиков, определенная схема</a:t>
+            </a:r>
+          </a:p>
+          <a:p>
+            <a:r>
+              <a:rPr lang="ru-RU" dirty="0"/>
+              <a:t> </a:t>
+            </a:r>
+            <a:r>
+              <a:rPr lang="ru-RU" dirty="0" smtClean="0"/>
+              <a:t>     вентиляции с центральным приточно-вытяжными каналами и    </a:t>
+            </a:r>
+          </a:p>
+          <a:p>
+            <a:r>
+              <a:rPr lang="ru-RU" dirty="0"/>
+              <a:t> </a:t>
+            </a:r>
+            <a:r>
+              <a:rPr lang="ru-RU" dirty="0" smtClean="0"/>
+              <a:t>     отдельными каналами для каждого помещения</a:t>
+            </a:r>
+            <a:endParaRPr lang="ru-RU" dirty="0"/>
           </a:p>
         </p:txBody>
       </p:sp>
     </p:spTree>
     <p:extLst>
       <p:ext uri="{BB962C8B-B14F-4D97-AF65-F5344CB8AC3E}">
-        <p14:creationId xmlns:p14="http://schemas.microsoft.com/office/powerpoint/2010/main" val="3292945454"/>
+        <p14:creationId xmlns:p14="http://schemas.microsoft.com/office/powerpoint/2010/main" val="3225043091"/>
+      </p:ext>
+    </p:extLst>
+  </p:cSld>
+  <p:clrMapOvr>
+    <a:masterClrMapping/>
+  </p:clrMapOvr>
+</p:sld>
+</file>
+
+<file path=ppt/slides/slide7.xml><?xml version="1.0" encoding="utf-8"?>
+<p:sld xmlns:a="http://schemas.openxmlformats.org/drawingml/2006/main" xmlns:r="http://schemas.openxmlformats.org/officeDocument/2006/relationships" xmlns:p="http://schemas.openxmlformats.org/presentationml/2006/main">
+  <p:cSld>
+    <p:spTree>
+      <p:nvGrpSpPr>
+        <p:cNvPr id="1" name=""/>
+        <p:cNvGrpSpPr/>
+        <p:nvPr/>
+      </p:nvGrpSpPr>
+      <p:grpSpPr>
+        <a:xfrm>
+          <a:off x="0" y="0"/>
+          <a:ext cx="0" cy="0"/>
+          <a:chOff x="0" y="0"/>
+          <a:chExt cx="0" cy="0"/>
+        </a:xfrm>
+      </p:grpSpPr>
+      <p:sp>
+        <p:nvSpPr>
+          <p:cNvPr id="2" name="Заголовок 1">
+            <a:extLst>
+              <a:ext uri="{FF2B5EF4-FFF2-40B4-BE49-F238E27FC236}">
+                <a16:creationId xmlns:a16="http://schemas.microsoft.com/office/drawing/2014/main" id="{5EA56E4F-4593-F090-BAAA-15835B31863E}"/>
+              </a:ext>
+            </a:extLst>
+          </p:cNvPr>
+          <p:cNvSpPr>
+            <a:spLocks noGrp="1"/>
+          </p:cNvSpPr>
+          <p:nvPr>
+            <p:ph type="title"/>
+          </p:nvPr>
+        </p:nvSpPr>
+        <p:spPr>
+          <a:xfrm>
+            <a:off x="108065" y="1123837"/>
+            <a:ext cx="3350030" cy="4601183"/>
+          </a:xfrm>
+        </p:spPr>
+        <p:txBody>
+          <a:bodyPr>
+            <a:normAutofit/>
+          </a:bodyPr>
+          <a:lstStyle/>
+          <a:p>
+            <a:r>
+              <a:rPr lang="ru-RU" sz="2800" dirty="0" smtClean="0"/>
+              <a:t>Целевая аудитория</a:t>
+            </a:r>
+            <a:endParaRPr lang="ru-RU" sz="2800" dirty="0"/>
+          </a:p>
+        </p:txBody>
+      </p:sp>
+      <p:sp>
+        <p:nvSpPr>
+          <p:cNvPr id="3" name="TextBox 2"/>
+          <p:cNvSpPr txBox="1"/>
+          <p:nvPr/>
+        </p:nvSpPr>
+        <p:spPr>
+          <a:xfrm>
+            <a:off x="3566159" y="66502"/>
+            <a:ext cx="7797338" cy="6494085"/>
+          </a:xfrm>
+          <a:prstGeom prst="rect">
+            <a:avLst/>
+          </a:prstGeom>
+          <a:noFill/>
+        </p:spPr>
+        <p:txBody>
+          <a:bodyPr wrap="square" rtlCol="0">
+            <a:spAutoFit/>
+          </a:bodyPr>
+          <a:lstStyle/>
+          <a:p>
+            <a:pPr marL="171450" indent="-171450">
+              <a:buFont typeface="Arial" panose="020B0604020202020204" pitchFamily="34" charset="0"/>
+              <a:buChar char="•"/>
+            </a:pPr>
+            <a:r>
+              <a:rPr lang="ru-RU" sz="1400" b="1" dirty="0" smtClean="0"/>
+              <a:t>Управляющие</a:t>
+            </a:r>
+            <a:r>
+              <a:rPr lang="ru-RU" sz="1400" b="1" dirty="0"/>
+              <a:t> компании и собственники коммерческой </a:t>
+            </a:r>
+            <a:r>
+              <a:rPr lang="ru-RU" sz="1400" b="1" dirty="0" smtClean="0"/>
+              <a:t>недвижимости</a:t>
+            </a:r>
+            <a:endParaRPr lang="ru-RU" sz="1000" dirty="0"/>
+          </a:p>
+          <a:p>
+            <a:pPr lvl="1"/>
+            <a:r>
+              <a:rPr lang="ru-RU" sz="1000" b="1" dirty="0"/>
+              <a:t>Примеры:</a:t>
+            </a:r>
+            <a:r>
+              <a:rPr lang="ru-RU" sz="1000" dirty="0"/>
+              <a:t> бизнес‑центры, торговые </a:t>
+            </a:r>
+            <a:r>
+              <a:rPr lang="ru-RU" sz="1000" dirty="0" smtClean="0"/>
+              <a:t>центры,</a:t>
+            </a:r>
+            <a:r>
+              <a:rPr lang="ru-RU" sz="1000" dirty="0"/>
+              <a:t> гостиницы.</a:t>
+            </a:r>
+          </a:p>
+          <a:p>
+            <a:pPr lvl="1"/>
+            <a:r>
+              <a:rPr lang="ru-RU" sz="1000" b="1" dirty="0"/>
+              <a:t>Потребности:</a:t>
+            </a:r>
+            <a:endParaRPr lang="ru-RU" sz="1000" dirty="0"/>
+          </a:p>
+          <a:p>
+            <a:pPr lvl="2"/>
+            <a:r>
+              <a:rPr lang="ru-RU" sz="1000" dirty="0"/>
+              <a:t>снижение эксплуатационных расходов (особенно на электроэнергию);</a:t>
+            </a:r>
+          </a:p>
+          <a:p>
+            <a:pPr lvl="2"/>
+            <a:r>
+              <a:rPr lang="ru-RU" sz="1000" dirty="0"/>
+              <a:t>соответствие санитарным нормам и стандартам (ASHRAE, ГОСТ);</a:t>
+            </a:r>
+          </a:p>
+          <a:p>
+            <a:pPr lvl="2"/>
+            <a:r>
+              <a:rPr lang="ru-RU" sz="1000" dirty="0"/>
+              <a:t>обеспечение комфорта арендаторов/гостей;</a:t>
+            </a:r>
+          </a:p>
+          <a:p>
+            <a:pPr lvl="2"/>
+            <a:r>
+              <a:rPr lang="ru-RU" sz="1000" dirty="0"/>
+              <a:t>автоматизация инженерных систем.</a:t>
+            </a:r>
+          </a:p>
+          <a:p>
+            <a:pPr lvl="1"/>
+            <a:r>
+              <a:rPr lang="ru-RU" sz="1000" b="1" dirty="0"/>
+              <a:t>Мотивация к покупке:</a:t>
+            </a:r>
+            <a:r>
+              <a:rPr lang="ru-RU" sz="1000" dirty="0"/>
+              <a:t> экономия на счетах за электричество (до 40 %), повышение привлекательности объекта для арендаторов.</a:t>
+            </a:r>
+          </a:p>
+          <a:p>
+            <a:pPr lvl="1"/>
+            <a:r>
+              <a:rPr lang="ru-RU" sz="1000" b="1" dirty="0"/>
+              <a:t>Бюджет:</a:t>
+            </a:r>
+            <a:r>
+              <a:rPr lang="ru-RU" sz="1000" dirty="0"/>
+              <a:t> высокий, готовы инвестировать в долгосрочную экономию</a:t>
+            </a:r>
+            <a:r>
+              <a:rPr lang="ru-RU" sz="1000" dirty="0" smtClean="0"/>
+              <a:t>.</a:t>
+            </a:r>
+          </a:p>
+          <a:p>
+            <a:pPr lvl="1"/>
+            <a:endParaRPr lang="ru-RU" sz="1000" dirty="0"/>
+          </a:p>
+          <a:p>
+            <a:pPr marL="171450" indent="-171450">
+              <a:buFont typeface="Arial" panose="020B0604020202020204" pitchFamily="34" charset="0"/>
+              <a:buChar char="•"/>
+            </a:pPr>
+            <a:r>
+              <a:rPr lang="ru-RU" sz="1400" b="1" dirty="0" smtClean="0"/>
+              <a:t>Административные</a:t>
+            </a:r>
+            <a:r>
+              <a:rPr lang="ru-RU" sz="1400" b="1" dirty="0"/>
+              <a:t> и государственные </a:t>
+            </a:r>
+            <a:r>
+              <a:rPr lang="ru-RU" sz="1400" b="1" dirty="0" smtClean="0"/>
+              <a:t>учреждения</a:t>
+            </a:r>
+            <a:endParaRPr lang="ru-RU" sz="1000" b="1" dirty="0" smtClean="0"/>
+          </a:p>
+          <a:p>
+            <a:pPr lvl="1"/>
+            <a:r>
+              <a:rPr lang="ru-RU" sz="1000" b="1" dirty="0" smtClean="0"/>
+              <a:t>Примеры</a:t>
+            </a:r>
+            <a:r>
+              <a:rPr lang="ru-RU" sz="1000" b="1" dirty="0"/>
+              <a:t>:</a:t>
+            </a:r>
+            <a:r>
+              <a:rPr lang="ru-RU" sz="1000" dirty="0"/>
+              <a:t> школы, университеты, больницы, поликлиники, административные здания.</a:t>
+            </a:r>
+          </a:p>
+          <a:p>
+            <a:pPr lvl="1"/>
+            <a:r>
+              <a:rPr lang="ru-RU" sz="1000" b="1" dirty="0"/>
+              <a:t>Потребности:</a:t>
+            </a:r>
+            <a:endParaRPr lang="ru-RU" sz="1000" dirty="0"/>
+          </a:p>
+          <a:p>
+            <a:pPr lvl="2"/>
+            <a:r>
+              <a:rPr lang="ru-RU" sz="1000" dirty="0"/>
+              <a:t>поддержание здорового микроклимата для сотрудников и посетителей;</a:t>
+            </a:r>
+          </a:p>
+          <a:p>
+            <a:pPr lvl="2"/>
+            <a:r>
+              <a:rPr lang="ru-RU" sz="1000" dirty="0"/>
+              <a:t>соблюдение строгих санитарных норм;</a:t>
+            </a:r>
+          </a:p>
+          <a:p>
+            <a:pPr lvl="2"/>
+            <a:r>
+              <a:rPr lang="ru-RU" sz="1000" dirty="0"/>
+              <a:t>предотвращение распространения инфекций (особенно актуально для медучреждений);</a:t>
+            </a:r>
+          </a:p>
+          <a:p>
+            <a:pPr lvl="2"/>
+            <a:r>
+              <a:rPr lang="ru-RU" sz="1000" dirty="0"/>
+              <a:t>отчётность и мониторинг в реальном времени.</a:t>
+            </a:r>
+          </a:p>
+          <a:p>
+            <a:pPr lvl="1"/>
+            <a:r>
+              <a:rPr lang="ru-RU" sz="1000" b="1" dirty="0"/>
+              <a:t>Мотивация:</a:t>
+            </a:r>
+            <a:r>
+              <a:rPr lang="ru-RU" sz="1000" dirty="0"/>
+              <a:t> забота о здоровье людей, соответствие регуляторным требованиям.</a:t>
+            </a:r>
+          </a:p>
+          <a:p>
+            <a:pPr lvl="1"/>
+            <a:r>
+              <a:rPr lang="ru-RU" sz="1000" b="1" dirty="0"/>
+              <a:t>Бюджет:</a:t>
+            </a:r>
+            <a:r>
+              <a:rPr lang="ru-RU" sz="1000" dirty="0"/>
+              <a:t> средний/высокий, часто выделяются целевые средства на модернизацию.</a:t>
+            </a:r>
+          </a:p>
+          <a:p>
+            <a:pPr lvl="1"/>
+            <a:r>
+              <a:rPr lang="ru-RU" sz="1000" b="1" dirty="0"/>
+              <a:t>Ключевые требования:</a:t>
+            </a:r>
+            <a:r>
+              <a:rPr lang="ru-RU" sz="1000" dirty="0"/>
+              <a:t> надёжность, документированная точность измерений, интеграция с BMS</a:t>
+            </a:r>
+            <a:r>
+              <a:rPr lang="ru-RU" sz="1000" dirty="0" smtClean="0"/>
+              <a:t>.</a:t>
+            </a:r>
+          </a:p>
+          <a:p>
+            <a:pPr lvl="1"/>
+            <a:endParaRPr lang="ru-RU" sz="1400" b="1" dirty="0" smtClean="0"/>
+          </a:p>
+          <a:p>
+            <a:pPr marL="171450" indent="-171450">
+              <a:buFont typeface="Arial" panose="020B0604020202020204" pitchFamily="34" charset="0"/>
+              <a:buChar char="•"/>
+            </a:pPr>
+            <a:r>
+              <a:rPr lang="ru-RU" sz="1400" b="1" dirty="0" smtClean="0"/>
+              <a:t>Промышленные</a:t>
+            </a:r>
+            <a:r>
+              <a:rPr lang="ru-RU" sz="1400" b="1" dirty="0"/>
+              <a:t> </a:t>
+            </a:r>
+            <a:r>
+              <a:rPr lang="ru-RU" sz="1400" b="1" dirty="0" smtClean="0"/>
+              <a:t>предприятия</a:t>
+            </a:r>
+            <a:endParaRPr lang="ru-RU" sz="1000" b="1" dirty="0" smtClean="0"/>
+          </a:p>
+          <a:p>
+            <a:pPr lvl="1"/>
+            <a:r>
+              <a:rPr lang="ru-RU" sz="1000" b="1" dirty="0" smtClean="0"/>
+              <a:t>Примеры</a:t>
+            </a:r>
+            <a:r>
+              <a:rPr lang="ru-RU" sz="1000" b="1" dirty="0"/>
+              <a:t>:</a:t>
+            </a:r>
+            <a:r>
+              <a:rPr lang="ru-RU" sz="1000" dirty="0"/>
+              <a:t> заводы, склады, логистические центры, производственные цеха.</a:t>
+            </a:r>
+          </a:p>
+          <a:p>
+            <a:pPr lvl="1"/>
+            <a:r>
+              <a:rPr lang="ru-RU" sz="1000" b="1" dirty="0"/>
+              <a:t>Потребности:</a:t>
+            </a:r>
+            <a:endParaRPr lang="ru-RU" sz="1000" dirty="0"/>
+          </a:p>
+          <a:p>
+            <a:pPr lvl="2"/>
+            <a:r>
+              <a:rPr lang="ru-RU" sz="1000" dirty="0"/>
+              <a:t>контроль опасных газов (CO, ЛОС) для безопасности персонала;</a:t>
+            </a:r>
+          </a:p>
+          <a:p>
+            <a:pPr lvl="2"/>
+            <a:r>
+              <a:rPr lang="ru-RU" sz="1000" dirty="0"/>
+              <a:t>оптимизация вентиляции в зонах с разным уровнем загрязнения;</a:t>
+            </a:r>
+          </a:p>
+          <a:p>
+            <a:pPr lvl="2"/>
+            <a:r>
+              <a:rPr lang="ru-RU" sz="1000" dirty="0"/>
+              <a:t>предотвращение аварийных ситуаций;</a:t>
+            </a:r>
+          </a:p>
+          <a:p>
+            <a:pPr lvl="2"/>
+            <a:r>
+              <a:rPr lang="ru-RU" sz="1000" dirty="0"/>
+              <a:t>соответствие нормам охраны труда.</a:t>
+            </a:r>
+          </a:p>
+          <a:p>
+            <a:pPr lvl="1"/>
+            <a:r>
+              <a:rPr lang="ru-RU" sz="1000" b="1" dirty="0"/>
+              <a:t>Мотивация:</a:t>
+            </a:r>
+            <a:r>
+              <a:rPr lang="ru-RU" sz="1000" dirty="0"/>
+              <a:t> безопасность персонала, снижение рисков штрафов и аварий.</a:t>
+            </a:r>
+          </a:p>
+          <a:p>
+            <a:pPr lvl="1"/>
+            <a:r>
+              <a:rPr lang="ru-RU" sz="1000" b="1" dirty="0"/>
+              <a:t>Бюджет:</a:t>
+            </a:r>
+            <a:r>
+              <a:rPr lang="ru-RU" sz="1000" dirty="0"/>
+              <a:t> высокий (особенно в опасных производствах).</a:t>
+            </a:r>
+          </a:p>
+          <a:p>
+            <a:pPr lvl="1"/>
+            <a:r>
+              <a:rPr lang="ru-RU" sz="1000" b="1" dirty="0"/>
+              <a:t>Ключевые требования:</a:t>
+            </a:r>
+            <a:r>
+              <a:rPr lang="ru-RU" sz="1000" dirty="0"/>
+              <a:t> взрывозащищённое исполнение датчиков, высокая надёжность, устойчивость к агрессивным средам</a:t>
+            </a:r>
+            <a:r>
+              <a:rPr lang="ru-RU" sz="1000" dirty="0" smtClean="0"/>
+              <a:t>.</a:t>
+            </a:r>
+          </a:p>
+          <a:p>
+            <a:pPr lvl="1"/>
+            <a:endParaRPr lang="ru-RU" sz="1000" b="1" dirty="0" smtClean="0"/>
+          </a:p>
+          <a:p>
+            <a:pPr marL="171450" indent="-171450">
+              <a:buFont typeface="Arial" panose="020B0604020202020204" pitchFamily="34" charset="0"/>
+              <a:buChar char="•"/>
+            </a:pPr>
+            <a:r>
+              <a:rPr lang="ru-RU" sz="1400" b="1" dirty="0" smtClean="0"/>
+              <a:t>Операторы</a:t>
+            </a:r>
+            <a:r>
+              <a:rPr lang="ru-RU" sz="1400" b="1" dirty="0"/>
+              <a:t> дата‑центров и серверных помещений</a:t>
+            </a:r>
+            <a:endParaRPr lang="ru-RU" sz="1400" dirty="0"/>
+          </a:p>
+          <a:p>
+            <a:pPr lvl="1"/>
+            <a:r>
+              <a:rPr lang="ru-RU" sz="1000" b="1" dirty="0"/>
+              <a:t>Потребности:</a:t>
+            </a:r>
+            <a:endParaRPr lang="ru-RU" sz="1000" dirty="0"/>
+          </a:p>
+          <a:p>
+            <a:pPr lvl="2"/>
+            <a:r>
+              <a:rPr lang="ru-RU" sz="1000" dirty="0"/>
+              <a:t>контроль температуры и влажности для стабильной работы оборудования;</a:t>
+            </a:r>
+          </a:p>
+          <a:p>
+            <a:pPr lvl="2"/>
+            <a:r>
+              <a:rPr lang="ru-RU" sz="1000" dirty="0"/>
+              <a:t>минимизация энергопотребления систем охлаждения;</a:t>
+            </a:r>
+          </a:p>
+          <a:p>
+            <a:pPr lvl="2"/>
+            <a:r>
+              <a:rPr lang="ru-RU" sz="1000" dirty="0"/>
+              <a:t>раннее обнаружение утечек хладагентов или других газов.</a:t>
+            </a:r>
+          </a:p>
+          <a:p>
+            <a:pPr lvl="1"/>
+            <a:r>
+              <a:rPr lang="ru-RU" sz="1000" b="1" dirty="0"/>
+              <a:t>Мотивация:</a:t>
+            </a:r>
+            <a:r>
+              <a:rPr lang="ru-RU" sz="1000" dirty="0"/>
+              <a:t> предотвращение простоев оборудования, экономия на охлаждении.</a:t>
+            </a:r>
+          </a:p>
+          <a:p>
+            <a:pPr lvl="1"/>
+            <a:r>
+              <a:rPr lang="ru-RU" sz="1000" b="1" dirty="0"/>
+              <a:t>Бюджет:</a:t>
+            </a:r>
+            <a:r>
+              <a:rPr lang="ru-RU" sz="1000" dirty="0"/>
+              <a:t> очень высокий, приоритет — надёжность и безотказность.</a:t>
+            </a:r>
+          </a:p>
+          <a:p>
+            <a:pPr marL="285750" indent="-285750">
+              <a:buFont typeface="Arial" panose="020B0604020202020204" pitchFamily="34" charset="0"/>
+              <a:buChar char="•"/>
+            </a:pPr>
+            <a:endParaRPr lang="ru-RU" sz="1000" dirty="0">
+              <a:latin typeface="YS Geo"/>
+            </a:endParaRPr>
+          </a:p>
+        </p:txBody>
+      </p:sp>
+    </p:spTree>
+    <p:extLst>
+      <p:ext uri="{BB962C8B-B14F-4D97-AF65-F5344CB8AC3E}">
+        <p14:creationId xmlns:p14="http://schemas.microsoft.com/office/powerpoint/2010/main" val="2275226577"/>
+      </p:ext>
+    </p:extLst>
+  </p:cSld>
+  <p:clrMapOvr>
+    <a:masterClrMapping/>
+  </p:clrMapOvr>
+</p:sld>
+</file>
+
+<file path=ppt/slides/slide8.xml><?xml version="1.0" encoding="utf-8"?>
+<p:sld xmlns:a="http://schemas.openxmlformats.org/drawingml/2006/main" xmlns:r="http://schemas.openxmlformats.org/officeDocument/2006/relationships" xmlns:p="http://schemas.openxmlformats.org/presentationml/2006/main">
+  <p:cSld>
+    <p:spTree>
+      <p:nvGrpSpPr>
+        <p:cNvPr id="1" name=""/>
+        <p:cNvGrpSpPr/>
+        <p:nvPr/>
+      </p:nvGrpSpPr>
+      <p:grpSpPr>
+        <a:xfrm>
+          <a:off x="0" y="0"/>
+          <a:ext cx="0" cy="0"/>
+          <a:chOff x="0" y="0"/>
+          <a:chExt cx="0" cy="0"/>
+        </a:xfrm>
+      </p:grpSpPr>
+      <p:sp>
+        <p:nvSpPr>
+          <p:cNvPr id="2" name="Заголовок 1">
+            <a:extLst>
+              <a:ext uri="{FF2B5EF4-FFF2-40B4-BE49-F238E27FC236}">
+                <a16:creationId xmlns:a16="http://schemas.microsoft.com/office/drawing/2014/main" id="{5EA56E4F-4593-F090-BAAA-15835B31863E}"/>
+              </a:ext>
+            </a:extLst>
+          </p:cNvPr>
+          <p:cNvSpPr>
+            <a:spLocks noGrp="1"/>
+          </p:cNvSpPr>
+          <p:nvPr>
+            <p:ph type="title"/>
+          </p:nvPr>
+        </p:nvSpPr>
+        <p:spPr>
+          <a:xfrm>
+            <a:off x="108065" y="1123837"/>
+            <a:ext cx="3350030" cy="4601183"/>
+          </a:xfrm>
+        </p:spPr>
+        <p:txBody>
+          <a:bodyPr>
+            <a:normAutofit/>
+          </a:bodyPr>
+          <a:lstStyle/>
+          <a:p>
+            <a:r>
+              <a:rPr lang="ru-RU" sz="2800" dirty="0" smtClean="0"/>
+              <a:t>Гипотеза</a:t>
+            </a:r>
+            <a:endParaRPr lang="ru-RU" sz="2800" dirty="0"/>
+          </a:p>
+        </p:txBody>
+      </p:sp>
+      <p:sp>
+        <p:nvSpPr>
+          <p:cNvPr id="3" name="TextBox 2">
+            <a:extLst>
+              <a:ext uri="{FF2B5EF4-FFF2-40B4-BE49-F238E27FC236}">
+                <a16:creationId xmlns:a16="http://schemas.microsoft.com/office/drawing/2014/main" id="{FC85D806-9C5D-64EC-0D4D-7A9F2BA23C37}"/>
+              </a:ext>
+            </a:extLst>
+          </p:cNvPr>
+          <p:cNvSpPr txBox="1"/>
+          <p:nvPr/>
+        </p:nvSpPr>
+        <p:spPr>
+          <a:xfrm>
+            <a:off x="3636740" y="2516487"/>
+            <a:ext cx="7936301" cy="1815882"/>
+          </a:xfrm>
+          <a:prstGeom prst="rect">
+            <a:avLst/>
+          </a:prstGeom>
+          <a:noFill/>
+        </p:spPr>
+        <p:txBody>
+          <a:bodyPr wrap="square" rtlCol="0">
+            <a:spAutoFit/>
+          </a:bodyPr>
+          <a:lstStyle/>
+          <a:p>
+            <a:r>
+              <a:rPr lang="ru-RU" sz="1600" dirty="0">
+                <a:latin typeface="YS Geo"/>
+              </a:rPr>
+              <a:t>Если внедрить автоматизированную систему контроля качества воздуха с </a:t>
+            </a:r>
+          </a:p>
+          <a:p>
+            <a:r>
+              <a:rPr lang="ru-RU" sz="1600" dirty="0">
+                <a:latin typeface="YS Geo"/>
+              </a:rPr>
+              <a:t>ML‑моделью для управления приточно‑вытяжной вентиляцией в больших </a:t>
+            </a:r>
+          </a:p>
+          <a:p>
+            <a:r>
+              <a:rPr lang="ru-RU" sz="1600" dirty="0">
+                <a:latin typeface="YS Geo"/>
+              </a:rPr>
+              <a:t>зданиях, то можно сократить энергопотребление на 25–40 % по сравнению </a:t>
+            </a:r>
+          </a:p>
+          <a:p>
+            <a:r>
+              <a:rPr lang="ru-RU" sz="1600" dirty="0">
+                <a:latin typeface="YS Geo"/>
+              </a:rPr>
+              <a:t>с традиционной круглосуточной вентиляцией и улучшить качество воздуха </a:t>
+            </a:r>
+          </a:p>
+          <a:p>
+            <a:r>
+              <a:rPr lang="ru-RU" sz="1600" dirty="0">
+                <a:latin typeface="YS Geo"/>
+              </a:rPr>
+              <a:t>там где необходимо, потому что система будет активировать проветривание </a:t>
+            </a:r>
+          </a:p>
+          <a:p>
+            <a:r>
+              <a:rPr lang="ru-RU" sz="1600" dirty="0">
+                <a:latin typeface="YS Geo"/>
+              </a:rPr>
+              <a:t>только в тех помещениях, где реально зафиксировано ухудшение качества </a:t>
+            </a:r>
+            <a:endParaRPr lang="ru-RU" sz="1600" dirty="0" smtClean="0">
+              <a:latin typeface="YS Geo"/>
+            </a:endParaRPr>
+          </a:p>
+          <a:p>
+            <a:r>
+              <a:rPr lang="ru-RU" sz="1600" dirty="0" smtClean="0">
+                <a:latin typeface="YS Geo"/>
+              </a:rPr>
+              <a:t>воздуха</a:t>
+            </a:r>
+            <a:r>
+              <a:rPr lang="ru-RU" sz="1600" dirty="0">
+                <a:latin typeface="YS Geo"/>
+              </a:rPr>
+              <a:t>, </a:t>
+            </a:r>
+            <a:r>
+              <a:rPr lang="ru-RU" sz="1600" dirty="0" smtClean="0">
+                <a:latin typeface="YS Geo"/>
+              </a:rPr>
+              <a:t>а</a:t>
+            </a:r>
+            <a:r>
+              <a:rPr lang="ru-RU" sz="1600" dirty="0">
+                <a:latin typeface="YS Geo"/>
+              </a:rPr>
+              <a:t> не работать по жёсткому расписанию или круглосуточно</a:t>
+            </a:r>
+          </a:p>
+        </p:txBody>
+      </p:sp>
+    </p:spTree>
+    <p:extLst>
+      <p:ext uri="{BB962C8B-B14F-4D97-AF65-F5344CB8AC3E}">
+        <p14:creationId xmlns:p14="http://schemas.microsoft.com/office/powerpoint/2010/main" val="695195317"/>
+      </p:ext>
+    </p:extLst>
+  </p:cSld>
+  <p:clrMapOvr>
+    <a:masterClrMapping/>
+  </p:clrMapOvr>
+</p:sld>
+</file>
+
+<file path=ppt/slides/slide9.xml><?xml version="1.0" encoding="utf-8"?>
+<p:sld xmlns:a="http://schemas.openxmlformats.org/drawingml/2006/main" xmlns:r="http://schemas.openxmlformats.org/officeDocument/2006/relationships" xmlns:p="http://schemas.openxmlformats.org/presentationml/2006/main">
+  <p:cSld>
+    <p:spTree>
+      <p:nvGrpSpPr>
+        <p:cNvPr id="1" name=""/>
+        <p:cNvGrpSpPr/>
+        <p:nvPr/>
+      </p:nvGrpSpPr>
+      <p:grpSpPr>
+        <a:xfrm>
+          <a:off x="0" y="0"/>
+          <a:ext cx="0" cy="0"/>
+          <a:chOff x="0" y="0"/>
+          <a:chExt cx="0" cy="0"/>
+        </a:xfrm>
+      </p:grpSpPr>
+      <p:sp>
+        <p:nvSpPr>
+          <p:cNvPr id="2" name="Заголовок 1">
+            <a:extLst>
+              <a:ext uri="{FF2B5EF4-FFF2-40B4-BE49-F238E27FC236}">
+                <a16:creationId xmlns:a16="http://schemas.microsoft.com/office/drawing/2014/main" id="{5EA56E4F-4593-F090-BAAA-15835B31863E}"/>
+              </a:ext>
+            </a:extLst>
+          </p:cNvPr>
+          <p:cNvSpPr>
+            <a:spLocks noGrp="1"/>
+          </p:cNvSpPr>
+          <p:nvPr>
+            <p:ph type="title"/>
+          </p:nvPr>
+        </p:nvSpPr>
+        <p:spPr>
+          <a:xfrm>
+            <a:off x="108065" y="1123837"/>
+            <a:ext cx="3350030" cy="4601183"/>
+          </a:xfrm>
+        </p:spPr>
+        <p:txBody>
+          <a:bodyPr>
+            <a:normAutofit/>
+          </a:bodyPr>
+          <a:lstStyle/>
+          <a:p>
+            <a:r>
+              <a:rPr lang="ru-RU" sz="2800" dirty="0" smtClean="0"/>
+              <a:t>Конкуренты</a:t>
+            </a:r>
+            <a:endParaRPr lang="ru-RU" sz="2800" dirty="0"/>
+          </a:p>
+        </p:txBody>
+      </p:sp>
+      <p:pic>
+        <p:nvPicPr>
+          <p:cNvPr id="4" name="Рисунок 3"/>
+          <p:cNvPicPr>
+            <a:picLocks noChangeAspect="1"/>
+          </p:cNvPicPr>
+          <p:nvPr/>
+        </p:nvPicPr>
+        <p:blipFill>
+          <a:blip r:embed="rId2"/>
+          <a:stretch>
+            <a:fillRect/>
+          </a:stretch>
+        </p:blipFill>
+        <p:spPr>
+          <a:xfrm>
+            <a:off x="3458095" y="1700209"/>
+            <a:ext cx="8578734" cy="3654227"/>
+          </a:xfrm>
+          <a:prstGeom prst="rect">
+            <a:avLst/>
+          </a:prstGeom>
+        </p:spPr>
+      </p:pic>
+    </p:spTree>
+    <p:extLst>
+      <p:ext uri="{BB962C8B-B14F-4D97-AF65-F5344CB8AC3E}">
+        <p14:creationId xmlns:p14="http://schemas.microsoft.com/office/powerpoint/2010/main" val="314210099"/>
       </p:ext>
     </p:extLst>
   </p:cSld>

--- a/Презентация/АэроМонитор.pptx
+++ b/Презентация/АэроМонитор.pptx
@@ -4861,7 +4861,6 @@
               <a:rPr lang="ru-RU" sz="2800" dirty="0"/>
               <a:t>: признаки для модели качества воздуха</a:t>
             </a:r>
-            <a:endParaRPr lang="ru-RU" sz="2800" dirty="0"/>
           </a:p>
         </p:txBody>
       </p:sp>
@@ -4991,29 +4990,8 @@
               <a:rPr lang="ru-RU" sz="1600" dirty="0">
                 <a:latin typeface="YS Geo"/>
               </a:rPr>
-              <a:t>системы поступают показания с датчиков, дни </a:t>
-            </a:r>
-            <a:r>
-              <a:rPr lang="ru-RU" sz="1600" dirty="0">
-                <a:latin typeface="YS Geo"/>
-              </a:rPr>
-              <a:t>недели, признак </a:t>
-            </a:r>
-            <a:r>
-              <a:rPr lang="ru-RU" sz="1600" dirty="0">
-                <a:latin typeface="YS Geo"/>
-              </a:rPr>
-              <a:t>состояния </a:t>
-            </a:r>
-            <a:r>
-              <a:rPr lang="ru-RU" sz="1600" dirty="0">
-                <a:latin typeface="YS Geo"/>
-              </a:rPr>
-              <a:t>клапана, время суток, сезон, занятость помещения, температура и влажность с уличных датчиков</a:t>
-            </a:r>
-            <a:endParaRPr lang="ru-RU" sz="1600" dirty="0">
-              <a:latin typeface="YS Geo"/>
-            </a:endParaRPr>
+              <a:t>системы поступают показания с датчиков, дни недели, признак состояния клапана, время суток, сезон, занятость помещения, температура и влажность с уличных датчиков</a:t>
+            </a:r>
           </a:p>
         </p:txBody>
       </p:sp>
@@ -5065,23 +5043,8 @@
               <a:rPr lang="ru-RU" sz="1600" dirty="0">
                 <a:latin typeface="YS Geo"/>
               </a:rPr>
-              <a:t>, по которому определяем какой клапан открыть</a:t>
-            </a:r>
-            <a:r>
-              <a:rPr lang="ru-RU" sz="1600" dirty="0">
-                <a:latin typeface="YS Geo"/>
-              </a:rPr>
-              <a:t>,</a:t>
-            </a:r>
-            <a:r>
-              <a:rPr lang="ru-RU" sz="1600" dirty="0">
-                <a:latin typeface="YS Geo"/>
-              </a:rPr>
-              <a:t> включить двигатели вентиляторов</a:t>
-            </a:r>
-            <a:endParaRPr lang="ru-RU" sz="1600" dirty="0">
-              <a:latin typeface="YS Geo"/>
-            </a:endParaRPr>
+              <a:t>, по которому определяем какой клапан открыть, включить двигатели вентиляторов</a:t>
+            </a:r>
           </a:p>
         </p:txBody>
       </p:sp>

--- a/Презентация/АэроМонитор.pptx
+++ b/Презентация/АэроМонитор.pptx
@@ -16,7 +16,8 @@
     <p:sldId id="266" r:id="rId10"/>
     <p:sldId id="267" r:id="rId11"/>
     <p:sldId id="268" r:id="rId12"/>
-    <p:sldId id="270" r:id="rId13"/>
+    <p:sldId id="271" r:id="rId13"/>
+    <p:sldId id="270" r:id="rId14"/>
   </p:sldIdLst>
   <p:sldSz cx="12192000" cy="6858000"/>
   <p:notesSz cx="6858000" cy="9144000"/>
@@ -3419,7 +3420,7 @@
           <a:lstStyle/>
           <a:p>
             <a:r>
-              <a:rPr lang="ru-RU" dirty="0" smtClean="0">
+              <a:rPr lang="ru-RU" dirty="0">
                 <a:solidFill>
                   <a:schemeClr val="bg1"/>
                 </a:solidFill>
@@ -3427,10 +3428,9 @@
               <a:t>АэроМонитор</a:t>
             </a:r>
             <a:r>
-              <a:rPr lang="ru-RU" dirty="0" smtClean="0"/>
+              <a:rPr lang="ru-RU" dirty="0"/>
               <a:t> </a:t>
             </a:r>
-            <a:endParaRPr lang="ru-RU" dirty="0"/>
           </a:p>
         </p:txBody>
       </p:sp>
@@ -3521,10 +3521,9 @@
           <a:lstStyle/>
           <a:p>
             <a:r>
-              <a:rPr lang="ru-RU" sz="2800" dirty="0" smtClean="0"/>
+              <a:rPr lang="ru-RU" sz="2800" dirty="0"/>
               <a:t>Примерная архитектура</a:t>
             </a:r>
-            <a:endParaRPr lang="ru-RU" sz="2800" dirty="0"/>
           </a:p>
         </p:txBody>
       </p:sp>
@@ -3609,10 +3608,9 @@
           </a:lstStyle>
           <a:p>
             <a:r>
-              <a:rPr lang="ru-RU" sz="2800" dirty="0" smtClean="0"/>
+              <a:rPr lang="ru-RU" sz="2800" dirty="0"/>
               <a:t>Примерная архитектура</a:t>
             </a:r>
-            <a:endParaRPr lang="ru-RU" sz="2800" dirty="0"/>
           </a:p>
         </p:txBody>
       </p:sp>
@@ -3675,8 +3673,16 @@
           <a:lstStyle/>
           <a:p>
             <a:r>
-              <a:rPr lang="ru-RU" sz="2800" dirty="0" smtClean="0"/>
-              <a:t>Примерная архитектура</a:t>
+              <a:rPr lang="en-US" sz="2800" dirty="0"/>
+              <a:t>===</a:t>
+            </a:r>
+            <a:r>
+              <a:rPr lang="en-US" sz="2800" dirty="0">
+                <a:solidFill>
+                  <a:schemeClr val="tx1"/>
+                </a:solidFill>
+              </a:rPr>
+              <a:t>Stitch</a:t>
             </a:r>
             <a:endParaRPr lang="ru-RU" sz="2800" dirty="0"/>
           </a:p>
@@ -3733,17 +3739,47 @@
           </a:lstStyle>
           <a:p>
             <a:r>
-              <a:rPr lang="ru-RU" sz="2800" dirty="0" smtClean="0"/>
-              <a:t>Прототип  </a:t>
-            </a:r>
-            <a:r>
-              <a:rPr lang="en-US" sz="2800" dirty="0" smtClean="0"/>
+              <a:rPr lang="ru-RU" sz="2800" dirty="0"/>
+              <a:t>Прототипы  </a:t>
+            </a:r>
+            <a:r>
+              <a:rPr lang="en-US" sz="2800" dirty="0"/>
               <a:t>UI</a:t>
             </a:r>
             <a:endParaRPr lang="ru-RU" sz="2800" dirty="0"/>
           </a:p>
         </p:txBody>
       </p:sp>
+      <p:pic>
+        <p:nvPicPr>
+          <p:cNvPr id="4" name="Рисунок 3">
+            <a:extLst>
+              <a:ext uri="{FF2B5EF4-FFF2-40B4-BE49-F238E27FC236}">
+                <a16:creationId xmlns:a16="http://schemas.microsoft.com/office/drawing/2014/main" id="{0CA219F8-88D4-0868-4FF8-66B63B6B2DC6}"/>
+              </a:ext>
+            </a:extLst>
+          </p:cNvPr>
+          <p:cNvPicPr>
+            <a:picLocks noChangeAspect="1"/>
+          </p:cNvPicPr>
+          <p:nvPr/>
+        </p:nvPicPr>
+        <p:blipFill>
+          <a:blip r:embed="rId2"/>
+          <a:stretch>
+            <a:fillRect/>
+          </a:stretch>
+        </p:blipFill>
+        <p:spPr>
+          <a:xfrm>
+            <a:off x="4433977" y="1123950"/>
+            <a:ext cx="6551239" cy="5543356"/>
+          </a:xfrm>
+          <a:prstGeom prst="rect">
+            <a:avLst/>
+          </a:prstGeom>
+        </p:spPr>
+      </p:pic>
     </p:spTree>
     <p:extLst>
       <p:ext uri="{BB962C8B-B14F-4D97-AF65-F5344CB8AC3E}">
@@ -3787,6 +3823,172 @@
             <a:spLocks noGrp="1"/>
           </p:cNvSpPr>
           <p:nvPr>
+            <p:ph type="title" idx="4294967295"/>
+          </p:nvPr>
+        </p:nvSpPr>
+        <p:spPr>
+          <a:xfrm>
+            <a:off x="0" y="1123950"/>
+            <a:ext cx="3349625" cy="4600575"/>
+          </a:xfrm>
+        </p:spPr>
+        <p:txBody>
+          <a:bodyPr>
+            <a:normAutofit/>
+          </a:bodyPr>
+          <a:lstStyle/>
+          <a:p>
+            <a:r>
+              <a:rPr lang="en-US" sz="2800" dirty="0"/>
+              <a:t>===</a:t>
+            </a:r>
+            <a:r>
+              <a:rPr lang="en-US" sz="2800" dirty="0">
+                <a:solidFill>
+                  <a:schemeClr val="tx1"/>
+                </a:solidFill>
+              </a:rPr>
+              <a:t>poehali.dev</a:t>
+            </a:r>
+            <a:endParaRPr lang="ru-RU" sz="2800" dirty="0"/>
+          </a:p>
+        </p:txBody>
+      </p:sp>
+      <p:sp>
+        <p:nvSpPr>
+          <p:cNvPr id="9" name="Заголовок 1">
+            <a:extLst>
+              <a:ext uri="{FF2B5EF4-FFF2-40B4-BE49-F238E27FC236}">
+                <a16:creationId xmlns:a16="http://schemas.microsoft.com/office/drawing/2014/main" id="{5EA56E4F-4593-F090-BAAA-15835B31863E}"/>
+              </a:ext>
+            </a:extLst>
+          </p:cNvPr>
+          <p:cNvSpPr txBox="1">
+            <a:spLocks/>
+          </p:cNvSpPr>
+          <p:nvPr/>
+        </p:nvSpPr>
+        <p:spPr>
+          <a:xfrm>
+            <a:off x="532014" y="349657"/>
+            <a:ext cx="10665230" cy="622932"/>
+          </a:xfrm>
+          <a:prstGeom prst="rect">
+            <a:avLst/>
+          </a:prstGeom>
+          <a:solidFill>
+            <a:schemeClr val="accent1"/>
+          </a:solidFill>
+        </p:spPr>
+        <p:txBody>
+          <a:bodyPr>
+            <a:normAutofit/>
+          </a:bodyPr>
+          <a:lstStyle>
+            <a:lvl1pPr algn="l" defTabSz="914400" rtl="0" eaLnBrk="1" latinLnBrk="0" hangingPunct="1">
+              <a:lnSpc>
+                <a:spcPct val="90000"/>
+              </a:lnSpc>
+              <a:spcBef>
+                <a:spcPct val="0"/>
+              </a:spcBef>
+              <a:buNone/>
+              <a:defRPr sz="3600" kern="1200" spc="-60" baseline="0">
+                <a:solidFill>
+                  <a:srgbClr val="FFFFFF"/>
+                </a:solidFill>
+                <a:latin typeface="+mj-lt"/>
+                <a:ea typeface="+mj-ea"/>
+                <a:cs typeface="+mj-cs"/>
+              </a:defRPr>
+            </a:lvl1pPr>
+          </a:lstStyle>
+          <a:p>
+            <a:r>
+              <a:rPr lang="ru-RU" sz="2800" dirty="0"/>
+              <a:t>Прототипы  </a:t>
+            </a:r>
+            <a:r>
+              <a:rPr lang="en-US" sz="2800" dirty="0"/>
+              <a:t>UI</a:t>
+            </a:r>
+            <a:endParaRPr lang="ru-RU" sz="2800" dirty="0"/>
+          </a:p>
+        </p:txBody>
+      </p:sp>
+      <p:pic>
+        <p:nvPicPr>
+          <p:cNvPr id="5" name="Рисунок 4">
+            <a:extLst>
+              <a:ext uri="{FF2B5EF4-FFF2-40B4-BE49-F238E27FC236}">
+                <a16:creationId xmlns:a16="http://schemas.microsoft.com/office/drawing/2014/main" id="{89D840A9-CF01-3E80-007A-0222BAB163BC}"/>
+              </a:ext>
+            </a:extLst>
+          </p:cNvPr>
+          <p:cNvPicPr>
+            <a:picLocks noChangeAspect="1"/>
+          </p:cNvPicPr>
+          <p:nvPr/>
+        </p:nvPicPr>
+        <p:blipFill>
+          <a:blip r:embed="rId2"/>
+          <a:stretch>
+            <a:fillRect/>
+          </a:stretch>
+        </p:blipFill>
+        <p:spPr>
+          <a:xfrm>
+            <a:off x="2851561" y="1123950"/>
+            <a:ext cx="8147118" cy="5426497"/>
+          </a:xfrm>
+          <a:prstGeom prst="rect">
+            <a:avLst/>
+          </a:prstGeom>
+        </p:spPr>
+      </p:pic>
+    </p:spTree>
+    <p:extLst>
+      <p:ext uri="{BB962C8B-B14F-4D97-AF65-F5344CB8AC3E}">
+        <p14:creationId xmlns:p14="http://schemas.microsoft.com/office/powerpoint/2010/main" val="625958719"/>
+      </p:ext>
+    </p:extLst>
+  </p:cSld>
+  <p:clrMapOvr>
+    <a:masterClrMapping/>
+  </p:clrMapOvr>
+</p:sld>
+</file>
+
+<file path=ppt/slides/slide13.xml><?xml version="1.0" encoding="utf-8"?>
+<p:sld xmlns:a="http://schemas.openxmlformats.org/drawingml/2006/main" xmlns:r="http://schemas.openxmlformats.org/officeDocument/2006/relationships" xmlns:p="http://schemas.openxmlformats.org/presentationml/2006/main">
+  <p:cSld>
+    <p:spTree>
+      <p:nvGrpSpPr>
+        <p:cNvPr id="1" name=""/>
+        <p:cNvGrpSpPr/>
+        <p:nvPr/>
+      </p:nvGrpSpPr>
+      <p:grpSpPr>
+        <a:xfrm>
+          <a:off x="0" y="0"/>
+          <a:ext cx="0" cy="0"/>
+          <a:chOff x="0" y="0"/>
+          <a:chExt cx="0" cy="0"/>
+        </a:xfrm>
+      </p:grpSpPr>
+      <p:sp>
+        <p:nvSpPr>
+          <p:cNvPr id="2" name="Заголовок 1">
+            <a:extLst>
+              <a:ext uri="{FF2B5EF4-FFF2-40B4-BE49-F238E27FC236}">
+                <a16:creationId xmlns:a16="http://schemas.microsoft.com/office/drawing/2014/main" id="{5EA56E4F-4593-F090-BAAA-15835B31863E}"/>
+              </a:ext>
+            </a:extLst>
+          </p:cNvPr>
+          <p:cNvSpPr>
+            <a:spLocks noGrp="1"/>
+          </p:cNvSpPr>
+          <p:nvPr>
             <p:ph type="title"/>
           </p:nvPr>
         </p:nvSpPr>
@@ -3803,10 +4005,9 @@
           <a:lstStyle/>
           <a:p>
             <a:r>
-              <a:rPr lang="ru-RU" sz="2800" dirty="0" smtClean="0"/>
+              <a:rPr lang="ru-RU" sz="2800" dirty="0"/>
               <a:t>Проблемы</a:t>
             </a:r>
-            <a:endParaRPr lang="ru-RU" sz="2800" dirty="0"/>
           </a:p>
         </p:txBody>
       </p:sp>
@@ -3837,7 +4038,7 @@
               <a:buChar char="•"/>
             </a:pPr>
             <a:r>
-              <a:rPr lang="ru-RU" b="1" dirty="0" smtClean="0">
+              <a:rPr lang="ru-RU" b="1" dirty="0">
                 <a:latin typeface="Consolas" panose="020B0609020204030204" pitchFamily="49" charset="0"/>
               </a:rPr>
               <a:t>Где взять данные? Опытная эксплуатация и сбор данных с датчиков или случайная генерация с последующей классификацией на неразмеченных данных с привязкой к формуле связывающей все предикторы (стандарты ВОЗ, ГОСТ и др.)?</a:t>
@@ -4352,49 +4553,21 @@
                 <a:effectLst/>
                 <a:latin typeface="YS Geo"/>
               </a:rPr>
-              <a:t> — преждевременный износ оборудования, частая замена фильтров, большие </a:t>
-            </a:r>
-            <a:r>
-              <a:rPr lang="ru-RU" sz="1600" b="0" i="0" dirty="0" smtClean="0">
+              <a:t> — преждевременный износ оборудования, частая замена фильтров, большие счета</a:t>
+            </a:r>
+            <a:r>
+              <a:rPr lang="en-US" sz="1600" b="0" i="0" dirty="0">
                 <a:effectLst/>
                 <a:latin typeface="YS Geo"/>
               </a:rPr>
-              <a:t>счета</a:t>
-            </a:r>
-            <a:r>
-              <a:rPr lang="en-US" sz="1600" b="0" i="0" dirty="0" smtClean="0">
-                <a:effectLst/>
-                <a:latin typeface="YS Geo"/>
-              </a:rPr>
               <a:t> </a:t>
-            </a:r>
-            <a:r>
-              <a:rPr lang="ru-RU" sz="1600" b="0" i="0" dirty="0" smtClean="0">
-                <a:effectLst/>
-                <a:latin typeface="YS Geo"/>
-              </a:rPr>
-              <a:t>за</a:t>
             </a:r>
             <a:r>
               <a:rPr lang="ru-RU" sz="1600" b="0" i="0" dirty="0">
                 <a:effectLst/>
                 <a:latin typeface="YS Geo"/>
               </a:rPr>
-              <a:t> </a:t>
-            </a:r>
-            <a:r>
-              <a:rPr lang="ru-RU" sz="1600" b="0" i="0" dirty="0" smtClean="0">
-                <a:effectLst/>
-                <a:latin typeface="YS Geo"/>
-              </a:rPr>
-              <a:t>электричество</a:t>
-            </a:r>
-            <a:r>
-              <a:rPr lang="ru-RU" sz="1600" b="0" i="0" dirty="0">
-                <a:effectLst/>
-                <a:latin typeface="YS Geo"/>
-              </a:rPr>
-              <a:t> и отопление</a:t>
+              <a:t>за электричество и отопление</a:t>
             </a:r>
           </a:p>
           <a:p>
@@ -4458,35 +4631,21 @@
                 <a:effectLst/>
                 <a:latin typeface="YS Geo"/>
               </a:rPr>
-              <a:t> — неоптимальный режим работы снижает эффективность рекуперации, особенно </a:t>
-            </a:r>
-            <a:r>
-              <a:rPr lang="ru-RU" sz="1600" b="0" i="0" dirty="0" smtClean="0">
+              <a:t> — неоптимальный режим работы снижает эффективность рекуперации, особенно в</a:t>
+            </a:r>
+            <a:r>
+              <a:rPr lang="en-US" sz="1600" b="0" i="0" dirty="0">
                 <a:effectLst/>
                 <a:latin typeface="YS Geo"/>
               </a:rPr>
-              <a:t>в</a:t>
-            </a:r>
-            <a:r>
-              <a:rPr lang="en-US" sz="1600" b="0" i="0" dirty="0" smtClean="0">
-                <a:effectLst/>
-                <a:latin typeface="YS Geo"/>
-              </a:rPr>
               <a:t> </a:t>
-            </a:r>
-            <a:r>
-              <a:rPr lang="ru-RU" sz="1600" b="0" i="0" dirty="0" smtClean="0">
-                <a:effectLst/>
-                <a:latin typeface="YS Geo"/>
-              </a:rPr>
-              <a:t>холодное</a:t>
             </a:r>
             <a:r>
               <a:rPr lang="ru-RU" sz="1600" b="0" i="0" dirty="0">
                 <a:effectLst/>
                 <a:latin typeface="YS Geo"/>
               </a:rPr>
-              <a:t> время года.</a:t>
+              <a:t>холодное время года.</a:t>
             </a:r>
           </a:p>
           <a:p>
@@ -4670,22 +4829,13 @@
               </a:rPr>
               <a:t>Управление нагрузкой: </a:t>
             </a:r>
-            <a:endParaRPr lang="ru-RU" sz="1100" b="1" dirty="0" smtClean="0">
-              <a:latin typeface="Consolas" panose="020B0609020204030204" pitchFamily="49" charset="0"/>
-            </a:endParaRPr>
-          </a:p>
-          <a:p>
-            <a:r>
-              <a:rPr lang="ru-RU" sz="1100" b="1" dirty="0" smtClean="0">
-                <a:latin typeface="Consolas" panose="020B0609020204030204" pitchFamily="49" charset="0"/>
-              </a:rPr>
-              <a:t>вентиляторы </a:t>
-            </a:r>
+          </a:p>
+          <a:p>
             <a:r>
               <a:rPr lang="ru-RU" sz="1100" b="1" dirty="0">
                 <a:latin typeface="Consolas" panose="020B0609020204030204" pitchFamily="49" charset="0"/>
               </a:rPr>
-              <a:t>и клапаны</a:t>
+              <a:t>вентиляторы и клапаны</a:t>
             </a:r>
           </a:p>
         </p:txBody>
@@ -4823,43 +4973,19 @@
               <a:rPr lang="ru-RU" sz="2800" dirty="0"/>
               <a:t>Как датчики </a:t>
             </a:r>
-            <a:r>
-              <a:rPr lang="ru-RU" sz="2800" dirty="0" smtClean="0"/>
-              <a:t/>
-            </a:r>
             <a:br>
-              <a:rPr lang="ru-RU" sz="2800" dirty="0" smtClean="0"/>
+              <a:rPr lang="ru-RU" sz="2800" dirty="0"/>
             </a:br>
             <a:r>
-              <a:rPr lang="ru-RU" sz="2800" dirty="0" smtClean="0"/>
-              <a:t>превращаются</a:t>
-            </a:r>
-            <a:r>
               <a:rPr lang="ru-RU" sz="2800" dirty="0"/>
-              <a:t> </a:t>
-            </a:r>
-            <a:r>
-              <a:rPr lang="ru-RU" sz="2800" dirty="0" smtClean="0"/>
-              <a:t>в</a:t>
-            </a:r>
-            <a:r>
+              <a:t>превращаются в </a:t>
+            </a:r>
+            <a:br>
               <a:rPr lang="ru-RU" sz="2800" dirty="0"/>
-              <a:t> </a:t>
-            </a:r>
-            <a:r>
-              <a:rPr lang="ru-RU" sz="2800" dirty="0" smtClean="0"/>
-              <a:t/>
-            </a:r>
-            <a:br>
-              <a:rPr lang="ru-RU" sz="2800" dirty="0" smtClean="0"/>
             </a:br>
             <a:r>
-              <a:rPr lang="ru-RU" sz="2800" dirty="0" smtClean="0"/>
-              <a:t>интеллект</a:t>
-            </a:r>
-            <a:r>
               <a:rPr lang="ru-RU" sz="2800" dirty="0"/>
-              <a:t>: признаки для модели качества воздуха</a:t>
+              <a:t>интеллект: признаки для модели качества воздуха</a:t>
             </a:r>
           </a:p>
         </p:txBody>
@@ -4947,10 +5073,9 @@
           <a:lstStyle/>
           <a:p>
             <a:r>
-              <a:rPr lang="ru-RU" sz="2800" dirty="0" smtClean="0"/>
+              <a:rPr lang="ru-RU" sz="2800" dirty="0"/>
               <a:t>Ключевые моменты</a:t>
             </a:r>
-            <a:endParaRPr lang="ru-RU" sz="2800" dirty="0"/>
           </a:p>
         </p:txBody>
       </p:sp>
@@ -5082,27 +5207,7 @@
             </a:r>
             <a:r>
               <a:rPr lang="ru-RU" dirty="0"/>
-              <a:t> вентиляция работает только там, где </a:t>
-            </a:r>
-            <a:r>
-              <a:rPr lang="ru-RU" dirty="0" smtClean="0"/>
-              <a:t>нужно</a:t>
-            </a:r>
-            <a:r>
-              <a:rPr lang="ru-RU" dirty="0"/>
-              <a:t>, </a:t>
-            </a:r>
-            <a:r>
-              <a:rPr lang="ru-RU" dirty="0" smtClean="0"/>
-              <a:t>и когда нужно, а</a:t>
-            </a:r>
-            <a:r>
-              <a:rPr lang="ru-RU" dirty="0"/>
-              <a:t> не </a:t>
-            </a:r>
-            <a:r>
-              <a:rPr lang="ru-RU" dirty="0" smtClean="0"/>
-              <a:t>постоянно и во всех помещениях. Актуально в крупных зданиях, где нагрузки 10-100 КВт </a:t>
+              <a:t> вентиляция работает только там, где нужно, и когда нужно, а не постоянно и во всех помещениях. Актуально в крупных зданиях, где нагрузки 10-100 КВт </a:t>
             </a:r>
             <a:endParaRPr lang="ru-RU" sz="1600" dirty="0">
               <a:latin typeface="YS Geo"/>
@@ -5254,46 +5359,33 @@
               <a:buChar char="•"/>
             </a:pPr>
             <a:r>
-              <a:rPr lang="ru-RU" b="1" dirty="0" smtClean="0"/>
+              <a:rPr lang="ru-RU" b="1" dirty="0"/>
               <a:t>Минусы:</a:t>
             </a:r>
             <a:r>
               <a:rPr lang="ru-RU" dirty="0"/>
-              <a:t> </a:t>
-            </a:r>
-            <a:r>
-              <a:rPr lang="ru-RU" dirty="0" smtClean="0"/>
-              <a:t>зависимость от </a:t>
-            </a:r>
-            <a:r>
-              <a:rPr lang="en-US" dirty="0" smtClean="0"/>
+              <a:t> зависимость от </a:t>
+            </a:r>
+            <a:r>
+              <a:rPr lang="en-US" dirty="0"/>
               <a:t>ML</a:t>
             </a:r>
             <a:r>
-              <a:rPr lang="ru-RU" dirty="0" smtClean="0"/>
+              <a:rPr lang="ru-RU" dirty="0"/>
               <a:t>, калибровка датчиков, определенная схема</a:t>
             </a:r>
           </a:p>
           <a:p>
             <a:r>
               <a:rPr lang="ru-RU" dirty="0"/>
-              <a:t> </a:t>
-            </a:r>
-            <a:r>
-              <a:rPr lang="ru-RU" dirty="0" smtClean="0"/>
-              <a:t>     вентиляции с центральным приточно-вытяжными каналами и    </a:t>
+              <a:t>      вентиляции с центральным приточно-вытяжными каналами и    </a:t>
             </a:r>
           </a:p>
           <a:p>
             <a:r>
               <a:rPr lang="ru-RU" dirty="0"/>
-              <a:t> </a:t>
-            </a:r>
-            <a:r>
-              <a:rPr lang="ru-RU" dirty="0" smtClean="0"/>
-              <a:t>     отдельными каналами для каждого помещения</a:t>
-            </a:r>
-            <a:endParaRPr lang="ru-RU" dirty="0"/>
+              <a:t>      отдельными каналами для каждого помещения</a:t>
+            </a:r>
           </a:p>
         </p:txBody>
       </p:sp>
@@ -5356,10 +5448,9 @@
           <a:lstStyle/>
           <a:p>
             <a:r>
-              <a:rPr lang="ru-RU" sz="2800" dirty="0" smtClean="0"/>
+              <a:rPr lang="ru-RU" sz="2800" dirty="0"/>
               <a:t>Целевая аудитория</a:t>
             </a:r>
-            <a:endParaRPr lang="ru-RU" sz="2800" dirty="0"/>
           </a:p>
         </p:txBody>
       </p:sp>
@@ -5390,16 +5481,8 @@
               <a:buChar char="•"/>
             </a:pPr>
             <a:r>
-              <a:rPr lang="ru-RU" sz="1400" b="1" dirty="0" smtClean="0"/>
-              <a:t>Управляющие</a:t>
-            </a:r>
-            <a:r>
               <a:rPr lang="ru-RU" sz="1400" b="1" dirty="0"/>
-              <a:t> компании и собственники коммерческой </a:t>
-            </a:r>
-            <a:r>
-              <a:rPr lang="ru-RU" sz="1400" b="1" dirty="0" smtClean="0"/>
-              <a:t>недвижимости</a:t>
+              <a:t>Управляющие компании и собственники коммерческой недвижимости</a:t>
             </a:r>
             <a:endParaRPr lang="ru-RU" sz="1000" dirty="0"/>
           </a:p>
@@ -5411,15 +5494,7 @@
             </a:r>
             <a:r>
               <a:rPr lang="ru-RU" sz="1000" dirty="0"/>
-              <a:t> бизнес‑центры, торговые </a:t>
-            </a:r>
-            <a:r>
-              <a:rPr lang="ru-RU" sz="1000" dirty="0" smtClean="0"/>
-              <a:t>центры,</a:t>
-            </a:r>
-            <a:r>
-              <a:rPr lang="ru-RU" sz="1000" dirty="0"/>
-              <a:t> гостиницы.</a:t>
+              <a:t> бизнес‑центры, торговые центры, гостиницы.</a:t>
             </a:r>
           </a:p>
           <a:p>
@@ -5477,11 +5552,7 @@
             </a:r>
             <a:r>
               <a:rPr lang="ru-RU" sz="1000" dirty="0"/>
-              <a:t> высокий, готовы инвестировать в долгосрочную экономию</a:t>
-            </a:r>
-            <a:r>
-              <a:rPr lang="ru-RU" sz="1000" dirty="0" smtClean="0"/>
-              <a:t>.</a:t>
+              <a:t> высокий, готовы инвестировать в долгосрочную экономию.</a:t>
             </a:r>
           </a:p>
           <a:p>
@@ -5494,28 +5565,16 @@
               <a:buChar char="•"/>
             </a:pPr>
             <a:r>
-              <a:rPr lang="ru-RU" sz="1400" b="1" dirty="0" smtClean="0"/>
-              <a:t>Административные</a:t>
-            </a:r>
-            <a:r>
               <a:rPr lang="ru-RU" sz="1400" b="1" dirty="0"/>
-              <a:t> и государственные </a:t>
-            </a:r>
-            <a:r>
-              <a:rPr lang="ru-RU" sz="1400" b="1" dirty="0" smtClean="0"/>
-              <a:t>учреждения</a:t>
-            </a:r>
-            <a:endParaRPr lang="ru-RU" sz="1000" b="1" dirty="0" smtClean="0"/>
+              <a:t>Административные и государственные учреждения</a:t>
+            </a:r>
+            <a:endParaRPr lang="ru-RU" sz="1000" b="1" dirty="0"/>
           </a:p>
           <a:p>
             <a:pPr lvl="1"/>
             <a:r>
-              <a:rPr lang="ru-RU" sz="1000" b="1" dirty="0" smtClean="0"/>
-              <a:t>Примеры</a:t>
-            </a:r>
-            <a:r>
               <a:rPr lang="ru-RU" sz="1000" b="1" dirty="0"/>
-              <a:t>:</a:t>
+              <a:t>Примеры:</a:t>
             </a:r>
             <a:r>
               <a:rPr lang="ru-RU" sz="1000" dirty="0"/>
@@ -5588,16 +5647,12 @@
             </a:r>
             <a:r>
               <a:rPr lang="ru-RU" sz="1000" dirty="0"/>
-              <a:t> надёжность, документированная точность измерений, интеграция с BMS</a:t>
-            </a:r>
-            <a:r>
-              <a:rPr lang="ru-RU" sz="1000" dirty="0" smtClean="0"/>
-              <a:t>.</a:t>
+              <a:t> надёжность, документированная точность измерений, интеграция с BMS.</a:t>
             </a:r>
           </a:p>
           <a:p>
             <a:pPr lvl="1"/>
-            <a:endParaRPr lang="ru-RU" sz="1400" b="1" dirty="0" smtClean="0"/>
+            <a:endParaRPr lang="ru-RU" sz="1400" b="1" dirty="0"/>
           </a:p>
           <a:p>
             <a:pPr marL="171450" indent="-171450">
@@ -5605,28 +5660,16 @@
               <a:buChar char="•"/>
             </a:pPr>
             <a:r>
-              <a:rPr lang="ru-RU" sz="1400" b="1" dirty="0" smtClean="0"/>
-              <a:t>Промышленные</a:t>
-            </a:r>
-            <a:r>
               <a:rPr lang="ru-RU" sz="1400" b="1" dirty="0"/>
-              <a:t> </a:t>
-            </a:r>
-            <a:r>
-              <a:rPr lang="ru-RU" sz="1400" b="1" dirty="0" smtClean="0"/>
-              <a:t>предприятия</a:t>
-            </a:r>
-            <a:endParaRPr lang="ru-RU" sz="1000" b="1" dirty="0" smtClean="0"/>
+              <a:t>Промышленные предприятия</a:t>
+            </a:r>
+            <a:endParaRPr lang="ru-RU" sz="1000" b="1" dirty="0"/>
           </a:p>
           <a:p>
             <a:pPr lvl="1"/>
             <a:r>
-              <a:rPr lang="ru-RU" sz="1000" b="1" dirty="0" smtClean="0"/>
-              <a:t>Примеры</a:t>
-            </a:r>
-            <a:r>
               <a:rPr lang="ru-RU" sz="1000" b="1" dirty="0"/>
-              <a:t>:</a:t>
+              <a:t>Примеры:</a:t>
             </a:r>
             <a:r>
               <a:rPr lang="ru-RU" sz="1000" dirty="0"/>
@@ -5699,16 +5742,12 @@
             </a:r>
             <a:r>
               <a:rPr lang="ru-RU" sz="1000" dirty="0"/>
-              <a:t> взрывозащищённое исполнение датчиков, высокая надёжность, устойчивость к агрессивным средам</a:t>
-            </a:r>
-            <a:r>
-              <a:rPr lang="ru-RU" sz="1000" dirty="0" smtClean="0"/>
-              <a:t>.</a:t>
+              <a:t> взрывозащищённое исполнение датчиков, высокая надёжность, устойчивость к агрессивным средам.</a:t>
             </a:r>
           </a:p>
           <a:p>
             <a:pPr lvl="1"/>
-            <a:endParaRPr lang="ru-RU" sz="1000" b="1" dirty="0" smtClean="0"/>
+            <a:endParaRPr lang="ru-RU" sz="1000" b="1" dirty="0"/>
           </a:p>
           <a:p>
             <a:pPr marL="171450" indent="-171450">
@@ -5716,12 +5755,8 @@
               <a:buChar char="•"/>
             </a:pPr>
             <a:r>
-              <a:rPr lang="ru-RU" sz="1400" b="1" dirty="0" smtClean="0"/>
-              <a:t>Операторы</a:t>
-            </a:r>
-            <a:r>
               <a:rPr lang="ru-RU" sz="1400" b="1" dirty="0"/>
-              <a:t> дата‑центров и серверных помещений</a:t>
+              <a:t>Операторы дата‑центров и серверных помещений</a:t>
             </a:r>
             <a:endParaRPr lang="ru-RU" sz="1400" dirty="0"/>
           </a:p>
@@ -5846,10 +5881,9 @@
           <a:lstStyle/>
           <a:p>
             <a:r>
-              <a:rPr lang="ru-RU" sz="2800" dirty="0" smtClean="0"/>
+              <a:rPr lang="ru-RU" sz="2800" dirty="0"/>
               <a:t>Гипотеза</a:t>
             </a:r>
-            <a:endParaRPr lang="ru-RU" sz="2800" dirty="0"/>
           </a:p>
         </p:txBody>
       </p:sp>
@@ -5868,7 +5902,7 @@
         <p:spPr>
           <a:xfrm>
             <a:off x="3636740" y="2516487"/>
-            <a:ext cx="7936301" cy="1815882"/>
+            <a:ext cx="7936301" cy="2308324"/>
           </a:xfrm>
           <a:prstGeom prst="rect">
             <a:avLst/>
@@ -5927,35 +5961,35 @@
               </a:rPr>
               <a:t>только в тех помещениях, где реально зафиксировано ухудшение качества </a:t>
             </a:r>
-            <a:endParaRPr lang="ru-RU" sz="1600" dirty="0" smtClean="0">
+          </a:p>
+          <a:p>
+            <a:r>
+              <a:rPr lang="ru-RU" sz="1600" dirty="0">
+                <a:latin typeface="YS Geo"/>
+              </a:rPr>
+              <a:t>воздуха, а не работать по жёсткому расписанию или круглосуточно, кроме того система будет прогнозировать возможные пики (когда много народа или другой фактор, скажем загрязнение в </a:t>
+            </a:r>
+            <a:r>
+              <a:rPr lang="en-US" sz="1600" dirty="0">
+                <a:latin typeface="YS Geo"/>
+              </a:rPr>
+              <a:t>n-</a:t>
+            </a:r>
+            <a:r>
+              <a:rPr lang="ru-RU" sz="1600" dirty="0">
+                <a:latin typeface="YS Geo"/>
+              </a:rPr>
+              <a:t>ом помещении</a:t>
+            </a:r>
+            <a:r>
+              <a:rPr lang="en-US" sz="1600" dirty="0">
+                <a:latin typeface="YS Geo"/>
+              </a:rPr>
+              <a:t>)</a:t>
+            </a:r>
+            <a:endParaRPr lang="ru-RU" sz="1600" dirty="0">
               <a:latin typeface="YS Geo"/>
             </a:endParaRPr>
-          </a:p>
-          <a:p>
-            <a:r>
-              <a:rPr lang="ru-RU" sz="1600" dirty="0" smtClean="0">
-                <a:latin typeface="YS Geo"/>
-              </a:rPr>
-              <a:t>воздуха</a:t>
-            </a:r>
-            <a:r>
-              <a:rPr lang="ru-RU" sz="1600" dirty="0">
-                <a:latin typeface="YS Geo"/>
-              </a:rPr>
-              <a:t>, </a:t>
-            </a:r>
-            <a:r>
-              <a:rPr lang="ru-RU" sz="1600" dirty="0" smtClean="0">
-                <a:latin typeface="YS Geo"/>
-              </a:rPr>
-              <a:t>а</a:t>
-            </a:r>
-            <a:r>
-              <a:rPr lang="ru-RU" sz="1600" dirty="0">
-                <a:latin typeface="YS Geo"/>
-              </a:rPr>
-              <a:t> не работать по жёсткому расписанию или круглосуточно</a:t>
-            </a:r>
           </a:p>
         </p:txBody>
       </p:sp>
@@ -6018,10 +6052,9 @@
           <a:lstStyle/>
           <a:p>
             <a:r>
-              <a:rPr lang="ru-RU" sz="2800" dirty="0" smtClean="0"/>
+              <a:rPr lang="ru-RU" sz="2800" dirty="0"/>
               <a:t>Конкуренты</a:t>
             </a:r>
-            <a:endParaRPr lang="ru-RU" sz="2800" dirty="0"/>
           </a:p>
         </p:txBody>
       </p:sp>

--- a/Презентация/АэроМонитор.pptx
+++ b/Презентация/АэроМонитор.pptx
@@ -17,7 +17,13 @@
     <p:sldId id="267" r:id="rId11"/>
     <p:sldId id="268" r:id="rId12"/>
     <p:sldId id="271" r:id="rId13"/>
-    <p:sldId id="270" r:id="rId14"/>
+    <p:sldId id="273" r:id="rId14"/>
+    <p:sldId id="274" r:id="rId15"/>
+    <p:sldId id="275" r:id="rId16"/>
+    <p:sldId id="276" r:id="rId17"/>
+    <p:sldId id="277" r:id="rId18"/>
+    <p:sldId id="278" r:id="rId19"/>
+    <p:sldId id="270" r:id="rId20"/>
   </p:sldIdLst>
   <p:sldSz cx="12192000" cy="6858000"/>
   <p:notesSz cx="6858000" cy="9144000"/>
@@ -3812,50 +3818,6 @@
       </p:grpSpPr>
       <p:sp>
         <p:nvSpPr>
-          <p:cNvPr id="2" name="Заголовок 1">
-            <a:extLst>
-              <a:ext uri="{FF2B5EF4-FFF2-40B4-BE49-F238E27FC236}">
-                <a16:creationId xmlns:a16="http://schemas.microsoft.com/office/drawing/2014/main" id="{5EA56E4F-4593-F090-BAAA-15835B31863E}"/>
-              </a:ext>
-            </a:extLst>
-          </p:cNvPr>
-          <p:cNvSpPr>
-            <a:spLocks noGrp="1"/>
-          </p:cNvSpPr>
-          <p:nvPr>
-            <p:ph type="title" idx="4294967295"/>
-          </p:nvPr>
-        </p:nvSpPr>
-        <p:spPr>
-          <a:xfrm>
-            <a:off x="0" y="1123950"/>
-            <a:ext cx="3349625" cy="4600575"/>
-          </a:xfrm>
-        </p:spPr>
-        <p:txBody>
-          <a:bodyPr>
-            <a:normAutofit/>
-          </a:bodyPr>
-          <a:lstStyle/>
-          <a:p>
-            <a:r>
-              <a:rPr lang="en-US" sz="2800" dirty="0"/>
-              <a:t>===</a:t>
-            </a:r>
-            <a:r>
-              <a:rPr lang="en-US" sz="2800" dirty="0">
-                <a:solidFill>
-                  <a:schemeClr val="tx1"/>
-                </a:solidFill>
-              </a:rPr>
-              <a:t>poehali.dev</a:t>
-            </a:r>
-            <a:endParaRPr lang="ru-RU" sz="2800" dirty="0"/>
-          </a:p>
-        </p:txBody>
-      </p:sp>
-      <p:sp>
-        <p:nvSpPr>
           <p:cNvPr id="9" name="Заголовок 1">
             <a:extLst>
               <a:ext uri="{FF2B5EF4-FFF2-40B4-BE49-F238E27FC236}">
@@ -3870,7 +3832,7 @@
         </p:nvSpPr>
         <p:spPr>
           <a:xfrm>
-            <a:off x="532014" y="349657"/>
+            <a:off x="0" y="297898"/>
             <a:ext cx="10665230" cy="622932"/>
           </a:xfrm>
           <a:prstGeom prst="rect">
@@ -3912,16 +3874,24 @@
               <a:rPr lang="en-US" sz="2800" dirty="0"/>
               <a:t>UI</a:t>
             </a:r>
+            <a:r>
+              <a:rPr lang="ru-RU" sz="2800" dirty="0"/>
+              <a:t> </a:t>
+            </a:r>
+            <a:r>
+              <a:rPr lang="en-US" sz="2800" dirty="0" err="1"/>
+              <a:t>poehali.dev</a:t>
+            </a:r>
             <a:endParaRPr lang="ru-RU" sz="2800" dirty="0"/>
           </a:p>
         </p:txBody>
       </p:sp>
       <p:pic>
         <p:nvPicPr>
-          <p:cNvPr id="5" name="Рисунок 4">
+          <p:cNvPr id="4" name="Рисунок 3">
             <a:extLst>
               <a:ext uri="{FF2B5EF4-FFF2-40B4-BE49-F238E27FC236}">
-                <a16:creationId xmlns:a16="http://schemas.microsoft.com/office/drawing/2014/main" id="{89D840A9-CF01-3E80-007A-0222BAB163BC}"/>
+                <a16:creationId xmlns:a16="http://schemas.microsoft.com/office/drawing/2014/main" id="{BFCAA5F5-3BE6-E7B1-9A72-E56150AC2AE5}"/>
               </a:ext>
             </a:extLst>
           </p:cNvPr>
@@ -3938,8 +3908,8 @@
         </p:blipFill>
         <p:spPr>
           <a:xfrm>
-            <a:off x="2851561" y="1123950"/>
-            <a:ext cx="8147118" cy="5426497"/>
+            <a:off x="1607848" y="1042816"/>
+            <a:ext cx="9057382" cy="5608150"/>
           </a:xfrm>
           <a:prstGeom prst="rect">
             <a:avLst/>
@@ -3960,6 +3930,786 @@
 </file>
 
 <file path=ppt/slides/slide13.xml><?xml version="1.0" encoding="utf-8"?>
+<p:sld xmlns:a="http://schemas.openxmlformats.org/drawingml/2006/main" xmlns:r="http://schemas.openxmlformats.org/officeDocument/2006/relationships" xmlns:p="http://schemas.openxmlformats.org/presentationml/2006/main">
+  <p:cSld>
+    <p:spTree>
+      <p:nvGrpSpPr>
+        <p:cNvPr id="1" name=""/>
+        <p:cNvGrpSpPr/>
+        <p:nvPr/>
+      </p:nvGrpSpPr>
+      <p:grpSpPr>
+        <a:xfrm>
+          <a:off x="0" y="0"/>
+          <a:ext cx="0" cy="0"/>
+          <a:chOff x="0" y="0"/>
+          <a:chExt cx="0" cy="0"/>
+        </a:xfrm>
+      </p:grpSpPr>
+      <p:sp>
+        <p:nvSpPr>
+          <p:cNvPr id="9" name="Заголовок 1">
+            <a:extLst>
+              <a:ext uri="{FF2B5EF4-FFF2-40B4-BE49-F238E27FC236}">
+                <a16:creationId xmlns:a16="http://schemas.microsoft.com/office/drawing/2014/main" id="{5EA56E4F-4593-F090-BAAA-15835B31863E}"/>
+              </a:ext>
+            </a:extLst>
+          </p:cNvPr>
+          <p:cNvSpPr txBox="1">
+            <a:spLocks/>
+          </p:cNvSpPr>
+          <p:nvPr/>
+        </p:nvSpPr>
+        <p:spPr>
+          <a:xfrm>
+            <a:off x="0" y="297898"/>
+            <a:ext cx="10665230" cy="622932"/>
+          </a:xfrm>
+          <a:prstGeom prst="rect">
+            <a:avLst/>
+          </a:prstGeom>
+          <a:solidFill>
+            <a:schemeClr val="accent1"/>
+          </a:solidFill>
+        </p:spPr>
+        <p:txBody>
+          <a:bodyPr>
+            <a:normAutofit/>
+          </a:bodyPr>
+          <a:lstStyle>
+            <a:lvl1pPr algn="l" defTabSz="914400" rtl="0" eaLnBrk="1" latinLnBrk="0" hangingPunct="1">
+              <a:lnSpc>
+                <a:spcPct val="90000"/>
+              </a:lnSpc>
+              <a:spcBef>
+                <a:spcPct val="0"/>
+              </a:spcBef>
+              <a:buNone/>
+              <a:defRPr sz="3600" kern="1200" spc="-60" baseline="0">
+                <a:solidFill>
+                  <a:srgbClr val="FFFFFF"/>
+                </a:solidFill>
+                <a:latin typeface="+mj-lt"/>
+                <a:ea typeface="+mj-ea"/>
+                <a:cs typeface="+mj-cs"/>
+              </a:defRPr>
+            </a:lvl1pPr>
+          </a:lstStyle>
+          <a:p>
+            <a:r>
+              <a:rPr lang="ru-RU" sz="2800" dirty="0"/>
+              <a:t>Прототипы  </a:t>
+            </a:r>
+            <a:r>
+              <a:rPr lang="en-US" sz="2800" dirty="0"/>
+              <a:t>UI</a:t>
+            </a:r>
+            <a:r>
+              <a:rPr lang="ru-RU" sz="2800" dirty="0"/>
+              <a:t> </a:t>
+            </a:r>
+            <a:r>
+              <a:rPr lang="en-US" sz="2800" dirty="0" err="1"/>
+              <a:t>poehali.dev</a:t>
+            </a:r>
+            <a:endParaRPr lang="ru-RU" sz="2800" dirty="0"/>
+          </a:p>
+        </p:txBody>
+      </p:sp>
+      <p:pic>
+        <p:nvPicPr>
+          <p:cNvPr id="3" name="Рисунок 2">
+            <a:extLst>
+              <a:ext uri="{FF2B5EF4-FFF2-40B4-BE49-F238E27FC236}">
+                <a16:creationId xmlns:a16="http://schemas.microsoft.com/office/drawing/2014/main" id="{CFC936DF-5D3C-728A-3B4A-C6DB2BA921F2}"/>
+              </a:ext>
+            </a:extLst>
+          </p:cNvPr>
+          <p:cNvPicPr>
+            <a:picLocks noChangeAspect="1"/>
+          </p:cNvPicPr>
+          <p:nvPr/>
+        </p:nvPicPr>
+        <p:blipFill>
+          <a:blip r:embed="rId2"/>
+          <a:stretch>
+            <a:fillRect/>
+          </a:stretch>
+        </p:blipFill>
+        <p:spPr>
+          <a:xfrm>
+            <a:off x="1639459" y="998416"/>
+            <a:ext cx="9025771" cy="5686046"/>
+          </a:xfrm>
+          <a:prstGeom prst="rect">
+            <a:avLst/>
+          </a:prstGeom>
+        </p:spPr>
+      </p:pic>
+    </p:spTree>
+    <p:extLst>
+      <p:ext uri="{BB962C8B-B14F-4D97-AF65-F5344CB8AC3E}">
+        <p14:creationId xmlns:p14="http://schemas.microsoft.com/office/powerpoint/2010/main" val="1073934637"/>
+      </p:ext>
+    </p:extLst>
+  </p:cSld>
+  <p:clrMapOvr>
+    <a:masterClrMapping/>
+  </p:clrMapOvr>
+</p:sld>
+</file>
+
+<file path=ppt/slides/slide14.xml><?xml version="1.0" encoding="utf-8"?>
+<p:sld xmlns:a="http://schemas.openxmlformats.org/drawingml/2006/main" xmlns:r="http://schemas.openxmlformats.org/officeDocument/2006/relationships" xmlns:p="http://schemas.openxmlformats.org/presentationml/2006/main">
+  <p:cSld>
+    <p:spTree>
+      <p:nvGrpSpPr>
+        <p:cNvPr id="1" name=""/>
+        <p:cNvGrpSpPr/>
+        <p:nvPr/>
+      </p:nvGrpSpPr>
+      <p:grpSpPr>
+        <a:xfrm>
+          <a:off x="0" y="0"/>
+          <a:ext cx="0" cy="0"/>
+          <a:chOff x="0" y="0"/>
+          <a:chExt cx="0" cy="0"/>
+        </a:xfrm>
+      </p:grpSpPr>
+      <p:sp>
+        <p:nvSpPr>
+          <p:cNvPr id="9" name="Заголовок 1">
+            <a:extLst>
+              <a:ext uri="{FF2B5EF4-FFF2-40B4-BE49-F238E27FC236}">
+                <a16:creationId xmlns:a16="http://schemas.microsoft.com/office/drawing/2014/main" id="{5EA56E4F-4593-F090-BAAA-15835B31863E}"/>
+              </a:ext>
+            </a:extLst>
+          </p:cNvPr>
+          <p:cNvSpPr txBox="1">
+            <a:spLocks/>
+          </p:cNvSpPr>
+          <p:nvPr/>
+        </p:nvSpPr>
+        <p:spPr>
+          <a:xfrm>
+            <a:off x="0" y="297898"/>
+            <a:ext cx="10665230" cy="622932"/>
+          </a:xfrm>
+          <a:prstGeom prst="rect">
+            <a:avLst/>
+          </a:prstGeom>
+          <a:solidFill>
+            <a:schemeClr val="accent1"/>
+          </a:solidFill>
+        </p:spPr>
+        <p:txBody>
+          <a:bodyPr>
+            <a:normAutofit/>
+          </a:bodyPr>
+          <a:lstStyle>
+            <a:lvl1pPr algn="l" defTabSz="914400" rtl="0" eaLnBrk="1" latinLnBrk="0" hangingPunct="1">
+              <a:lnSpc>
+                <a:spcPct val="90000"/>
+              </a:lnSpc>
+              <a:spcBef>
+                <a:spcPct val="0"/>
+              </a:spcBef>
+              <a:buNone/>
+              <a:defRPr sz="3600" kern="1200" spc="-60" baseline="0">
+                <a:solidFill>
+                  <a:srgbClr val="FFFFFF"/>
+                </a:solidFill>
+                <a:latin typeface="+mj-lt"/>
+                <a:ea typeface="+mj-ea"/>
+                <a:cs typeface="+mj-cs"/>
+              </a:defRPr>
+            </a:lvl1pPr>
+          </a:lstStyle>
+          <a:p>
+            <a:r>
+              <a:rPr lang="ru-RU" sz="2800" dirty="0"/>
+              <a:t>Прототипы  </a:t>
+            </a:r>
+            <a:r>
+              <a:rPr lang="en-US" sz="2800" dirty="0"/>
+              <a:t>UI</a:t>
+            </a:r>
+            <a:r>
+              <a:rPr lang="ru-RU" sz="2800" dirty="0"/>
+              <a:t> </a:t>
+            </a:r>
+            <a:r>
+              <a:rPr lang="en-US" sz="2800" dirty="0" err="1"/>
+              <a:t>poehali.dev</a:t>
+            </a:r>
+            <a:endParaRPr lang="ru-RU" sz="2800" dirty="0"/>
+          </a:p>
+        </p:txBody>
+      </p:sp>
+      <p:pic>
+        <p:nvPicPr>
+          <p:cNvPr id="3" name="Рисунок 2">
+            <a:extLst>
+              <a:ext uri="{FF2B5EF4-FFF2-40B4-BE49-F238E27FC236}">
+                <a16:creationId xmlns:a16="http://schemas.microsoft.com/office/drawing/2014/main" id="{9F66BB47-2D46-7724-D936-C4BED89C38BA}"/>
+              </a:ext>
+            </a:extLst>
+          </p:cNvPr>
+          <p:cNvPicPr>
+            <a:picLocks noChangeAspect="1"/>
+          </p:cNvPicPr>
+          <p:nvPr/>
+        </p:nvPicPr>
+        <p:blipFill>
+          <a:blip r:embed="rId2"/>
+          <a:stretch>
+            <a:fillRect/>
+          </a:stretch>
+        </p:blipFill>
+        <p:spPr>
+          <a:xfrm>
+            <a:off x="1803498" y="1063391"/>
+            <a:ext cx="8861732" cy="5565205"/>
+          </a:xfrm>
+          <a:prstGeom prst="rect">
+            <a:avLst/>
+          </a:prstGeom>
+        </p:spPr>
+      </p:pic>
+    </p:spTree>
+    <p:extLst>
+      <p:ext uri="{BB962C8B-B14F-4D97-AF65-F5344CB8AC3E}">
+        <p14:creationId xmlns:p14="http://schemas.microsoft.com/office/powerpoint/2010/main" val="491597310"/>
+      </p:ext>
+    </p:extLst>
+  </p:cSld>
+  <p:clrMapOvr>
+    <a:masterClrMapping/>
+  </p:clrMapOvr>
+</p:sld>
+</file>
+
+<file path=ppt/slides/slide15.xml><?xml version="1.0" encoding="utf-8"?>
+<p:sld xmlns:a="http://schemas.openxmlformats.org/drawingml/2006/main" xmlns:r="http://schemas.openxmlformats.org/officeDocument/2006/relationships" xmlns:p="http://schemas.openxmlformats.org/presentationml/2006/main">
+  <p:cSld>
+    <p:spTree>
+      <p:nvGrpSpPr>
+        <p:cNvPr id="1" name=""/>
+        <p:cNvGrpSpPr/>
+        <p:nvPr/>
+      </p:nvGrpSpPr>
+      <p:grpSpPr>
+        <a:xfrm>
+          <a:off x="0" y="0"/>
+          <a:ext cx="0" cy="0"/>
+          <a:chOff x="0" y="0"/>
+          <a:chExt cx="0" cy="0"/>
+        </a:xfrm>
+      </p:grpSpPr>
+      <p:sp>
+        <p:nvSpPr>
+          <p:cNvPr id="9" name="Заголовок 1">
+            <a:extLst>
+              <a:ext uri="{FF2B5EF4-FFF2-40B4-BE49-F238E27FC236}">
+                <a16:creationId xmlns:a16="http://schemas.microsoft.com/office/drawing/2014/main" id="{5EA56E4F-4593-F090-BAAA-15835B31863E}"/>
+              </a:ext>
+            </a:extLst>
+          </p:cNvPr>
+          <p:cNvSpPr txBox="1">
+            <a:spLocks/>
+          </p:cNvSpPr>
+          <p:nvPr/>
+        </p:nvSpPr>
+        <p:spPr>
+          <a:xfrm>
+            <a:off x="0" y="297898"/>
+            <a:ext cx="10665230" cy="622932"/>
+          </a:xfrm>
+          <a:prstGeom prst="rect">
+            <a:avLst/>
+          </a:prstGeom>
+          <a:solidFill>
+            <a:schemeClr val="accent1"/>
+          </a:solidFill>
+        </p:spPr>
+        <p:txBody>
+          <a:bodyPr>
+            <a:normAutofit/>
+          </a:bodyPr>
+          <a:lstStyle>
+            <a:lvl1pPr algn="l" defTabSz="914400" rtl="0" eaLnBrk="1" latinLnBrk="0" hangingPunct="1">
+              <a:lnSpc>
+                <a:spcPct val="90000"/>
+              </a:lnSpc>
+              <a:spcBef>
+                <a:spcPct val="0"/>
+              </a:spcBef>
+              <a:buNone/>
+              <a:defRPr sz="3600" kern="1200" spc="-60" baseline="0">
+                <a:solidFill>
+                  <a:srgbClr val="FFFFFF"/>
+                </a:solidFill>
+                <a:latin typeface="+mj-lt"/>
+                <a:ea typeface="+mj-ea"/>
+                <a:cs typeface="+mj-cs"/>
+              </a:defRPr>
+            </a:lvl1pPr>
+          </a:lstStyle>
+          <a:p>
+            <a:r>
+              <a:rPr lang="ru-RU" sz="2800" dirty="0"/>
+              <a:t>Прототипы  </a:t>
+            </a:r>
+            <a:r>
+              <a:rPr lang="en-US" sz="2800" dirty="0"/>
+              <a:t>UI</a:t>
+            </a:r>
+            <a:r>
+              <a:rPr lang="ru-RU" sz="2800" dirty="0"/>
+              <a:t> </a:t>
+            </a:r>
+            <a:r>
+              <a:rPr lang="en-US" sz="2800" dirty="0" err="1"/>
+              <a:t>poehali.dev</a:t>
+            </a:r>
+            <a:endParaRPr lang="ru-RU" sz="2800" dirty="0"/>
+          </a:p>
+        </p:txBody>
+      </p:sp>
+      <p:pic>
+        <p:nvPicPr>
+          <p:cNvPr id="3" name="Рисунок 2">
+            <a:extLst>
+              <a:ext uri="{FF2B5EF4-FFF2-40B4-BE49-F238E27FC236}">
+                <a16:creationId xmlns:a16="http://schemas.microsoft.com/office/drawing/2014/main" id="{C46ACCBE-E02F-6280-0E59-E5A6BE152BC1}"/>
+              </a:ext>
+            </a:extLst>
+          </p:cNvPr>
+          <p:cNvPicPr>
+            <a:picLocks noChangeAspect="1"/>
+          </p:cNvPicPr>
+          <p:nvPr/>
+        </p:nvPicPr>
+        <p:blipFill>
+          <a:blip r:embed="rId2"/>
+          <a:stretch>
+            <a:fillRect/>
+          </a:stretch>
+        </p:blipFill>
+        <p:spPr>
+          <a:xfrm>
+            <a:off x="1684210" y="1083558"/>
+            <a:ext cx="8981020" cy="5653672"/>
+          </a:xfrm>
+          <a:prstGeom prst="rect">
+            <a:avLst/>
+          </a:prstGeom>
+        </p:spPr>
+      </p:pic>
+    </p:spTree>
+    <p:extLst>
+      <p:ext uri="{BB962C8B-B14F-4D97-AF65-F5344CB8AC3E}">
+        <p14:creationId xmlns:p14="http://schemas.microsoft.com/office/powerpoint/2010/main" val="4016310203"/>
+      </p:ext>
+    </p:extLst>
+  </p:cSld>
+  <p:clrMapOvr>
+    <a:masterClrMapping/>
+  </p:clrMapOvr>
+</p:sld>
+</file>
+
+<file path=ppt/slides/slide16.xml><?xml version="1.0" encoding="utf-8"?>
+<p:sld xmlns:a="http://schemas.openxmlformats.org/drawingml/2006/main" xmlns:r="http://schemas.openxmlformats.org/officeDocument/2006/relationships" xmlns:p="http://schemas.openxmlformats.org/presentationml/2006/main">
+  <p:cSld>
+    <p:spTree>
+      <p:nvGrpSpPr>
+        <p:cNvPr id="1" name=""/>
+        <p:cNvGrpSpPr/>
+        <p:nvPr/>
+      </p:nvGrpSpPr>
+      <p:grpSpPr>
+        <a:xfrm>
+          <a:off x="0" y="0"/>
+          <a:ext cx="0" cy="0"/>
+          <a:chOff x="0" y="0"/>
+          <a:chExt cx="0" cy="0"/>
+        </a:xfrm>
+      </p:grpSpPr>
+      <p:sp>
+        <p:nvSpPr>
+          <p:cNvPr id="9" name="Заголовок 1">
+            <a:extLst>
+              <a:ext uri="{FF2B5EF4-FFF2-40B4-BE49-F238E27FC236}">
+                <a16:creationId xmlns:a16="http://schemas.microsoft.com/office/drawing/2014/main" id="{5EA56E4F-4593-F090-BAAA-15835B31863E}"/>
+              </a:ext>
+            </a:extLst>
+          </p:cNvPr>
+          <p:cNvSpPr txBox="1">
+            <a:spLocks/>
+          </p:cNvSpPr>
+          <p:nvPr/>
+        </p:nvSpPr>
+        <p:spPr>
+          <a:xfrm>
+            <a:off x="0" y="297898"/>
+            <a:ext cx="10665230" cy="622932"/>
+          </a:xfrm>
+          <a:prstGeom prst="rect">
+            <a:avLst/>
+          </a:prstGeom>
+          <a:solidFill>
+            <a:schemeClr val="accent1"/>
+          </a:solidFill>
+        </p:spPr>
+        <p:txBody>
+          <a:bodyPr>
+            <a:normAutofit/>
+          </a:bodyPr>
+          <a:lstStyle>
+            <a:lvl1pPr algn="l" defTabSz="914400" rtl="0" eaLnBrk="1" latinLnBrk="0" hangingPunct="1">
+              <a:lnSpc>
+                <a:spcPct val="90000"/>
+              </a:lnSpc>
+              <a:spcBef>
+                <a:spcPct val="0"/>
+              </a:spcBef>
+              <a:buNone/>
+              <a:defRPr sz="3600" kern="1200" spc="-60" baseline="0">
+                <a:solidFill>
+                  <a:srgbClr val="FFFFFF"/>
+                </a:solidFill>
+                <a:latin typeface="+mj-lt"/>
+                <a:ea typeface="+mj-ea"/>
+                <a:cs typeface="+mj-cs"/>
+              </a:defRPr>
+            </a:lvl1pPr>
+          </a:lstStyle>
+          <a:p>
+            <a:r>
+              <a:rPr lang="ru-RU" sz="2800" dirty="0"/>
+              <a:t>Прототипы  </a:t>
+            </a:r>
+            <a:r>
+              <a:rPr lang="en-US" sz="2800" dirty="0"/>
+              <a:t>UI</a:t>
+            </a:r>
+            <a:r>
+              <a:rPr lang="ru-RU" sz="2800" dirty="0"/>
+              <a:t> </a:t>
+            </a:r>
+            <a:r>
+              <a:rPr lang="en-US" sz="2800" dirty="0" err="1"/>
+              <a:t>poehali.dev</a:t>
+            </a:r>
+            <a:endParaRPr lang="ru-RU" sz="2800" dirty="0"/>
+          </a:p>
+        </p:txBody>
+      </p:sp>
+      <p:pic>
+        <p:nvPicPr>
+          <p:cNvPr id="3" name="Рисунок 2">
+            <a:extLst>
+              <a:ext uri="{FF2B5EF4-FFF2-40B4-BE49-F238E27FC236}">
+                <a16:creationId xmlns:a16="http://schemas.microsoft.com/office/drawing/2014/main" id="{FC4AEBA1-E8E5-C20F-28A3-C36F3B060ADA}"/>
+              </a:ext>
+            </a:extLst>
+          </p:cNvPr>
+          <p:cNvPicPr>
+            <a:picLocks noChangeAspect="1"/>
+          </p:cNvPicPr>
+          <p:nvPr/>
+        </p:nvPicPr>
+        <p:blipFill>
+          <a:blip r:embed="rId2"/>
+          <a:stretch>
+            <a:fillRect/>
+          </a:stretch>
+        </p:blipFill>
+        <p:spPr>
+          <a:xfrm>
+            <a:off x="1858364" y="1088165"/>
+            <a:ext cx="8806866" cy="5536922"/>
+          </a:xfrm>
+          <a:prstGeom prst="rect">
+            <a:avLst/>
+          </a:prstGeom>
+        </p:spPr>
+      </p:pic>
+    </p:spTree>
+    <p:extLst>
+      <p:ext uri="{BB962C8B-B14F-4D97-AF65-F5344CB8AC3E}">
+        <p14:creationId xmlns:p14="http://schemas.microsoft.com/office/powerpoint/2010/main" val="1835548875"/>
+      </p:ext>
+    </p:extLst>
+  </p:cSld>
+  <p:clrMapOvr>
+    <a:masterClrMapping/>
+  </p:clrMapOvr>
+</p:sld>
+</file>
+
+<file path=ppt/slides/slide17.xml><?xml version="1.0" encoding="utf-8"?>
+<p:sld xmlns:a="http://schemas.openxmlformats.org/drawingml/2006/main" xmlns:r="http://schemas.openxmlformats.org/officeDocument/2006/relationships" xmlns:p="http://schemas.openxmlformats.org/presentationml/2006/main">
+  <p:cSld>
+    <p:spTree>
+      <p:nvGrpSpPr>
+        <p:cNvPr id="1" name=""/>
+        <p:cNvGrpSpPr/>
+        <p:nvPr/>
+      </p:nvGrpSpPr>
+      <p:grpSpPr>
+        <a:xfrm>
+          <a:off x="0" y="0"/>
+          <a:ext cx="0" cy="0"/>
+          <a:chOff x="0" y="0"/>
+          <a:chExt cx="0" cy="0"/>
+        </a:xfrm>
+      </p:grpSpPr>
+      <p:sp>
+        <p:nvSpPr>
+          <p:cNvPr id="9" name="Заголовок 1">
+            <a:extLst>
+              <a:ext uri="{FF2B5EF4-FFF2-40B4-BE49-F238E27FC236}">
+                <a16:creationId xmlns:a16="http://schemas.microsoft.com/office/drawing/2014/main" id="{5EA56E4F-4593-F090-BAAA-15835B31863E}"/>
+              </a:ext>
+            </a:extLst>
+          </p:cNvPr>
+          <p:cNvSpPr txBox="1">
+            <a:spLocks/>
+          </p:cNvSpPr>
+          <p:nvPr/>
+        </p:nvSpPr>
+        <p:spPr>
+          <a:xfrm>
+            <a:off x="0" y="297898"/>
+            <a:ext cx="10665230" cy="622932"/>
+          </a:xfrm>
+          <a:prstGeom prst="rect">
+            <a:avLst/>
+          </a:prstGeom>
+          <a:solidFill>
+            <a:schemeClr val="accent1"/>
+          </a:solidFill>
+        </p:spPr>
+        <p:txBody>
+          <a:bodyPr>
+            <a:normAutofit/>
+          </a:bodyPr>
+          <a:lstStyle>
+            <a:lvl1pPr algn="l" defTabSz="914400" rtl="0" eaLnBrk="1" latinLnBrk="0" hangingPunct="1">
+              <a:lnSpc>
+                <a:spcPct val="90000"/>
+              </a:lnSpc>
+              <a:spcBef>
+                <a:spcPct val="0"/>
+              </a:spcBef>
+              <a:buNone/>
+              <a:defRPr sz="3600" kern="1200" spc="-60" baseline="0">
+                <a:solidFill>
+                  <a:srgbClr val="FFFFFF"/>
+                </a:solidFill>
+                <a:latin typeface="+mj-lt"/>
+                <a:ea typeface="+mj-ea"/>
+                <a:cs typeface="+mj-cs"/>
+              </a:defRPr>
+            </a:lvl1pPr>
+          </a:lstStyle>
+          <a:p>
+            <a:r>
+              <a:rPr lang="ru-RU" sz="2800" dirty="0"/>
+              <a:t>Прототипы  </a:t>
+            </a:r>
+            <a:r>
+              <a:rPr lang="en-US" sz="2800" dirty="0"/>
+              <a:t>UI</a:t>
+            </a:r>
+            <a:r>
+              <a:rPr lang="ru-RU" sz="2800" dirty="0"/>
+              <a:t> </a:t>
+            </a:r>
+            <a:r>
+              <a:rPr lang="en-US" sz="2800" dirty="0" err="1"/>
+              <a:t>poehali.dev</a:t>
+            </a:r>
+            <a:endParaRPr lang="ru-RU" sz="2800" dirty="0"/>
+          </a:p>
+        </p:txBody>
+      </p:sp>
+      <p:pic>
+        <p:nvPicPr>
+          <p:cNvPr id="3" name="Рисунок 2">
+            <a:extLst>
+              <a:ext uri="{FF2B5EF4-FFF2-40B4-BE49-F238E27FC236}">
+                <a16:creationId xmlns:a16="http://schemas.microsoft.com/office/drawing/2014/main" id="{22A5004B-3511-3F30-11A2-B9A0AEBDAAC2}"/>
+              </a:ext>
+            </a:extLst>
+          </p:cNvPr>
+          <p:cNvPicPr>
+            <a:picLocks noChangeAspect="1"/>
+          </p:cNvPicPr>
+          <p:nvPr/>
+        </p:nvPicPr>
+        <p:blipFill>
+          <a:blip r:embed="rId2"/>
+          <a:stretch>
+            <a:fillRect/>
+          </a:stretch>
+        </p:blipFill>
+        <p:spPr>
+          <a:xfrm>
+            <a:off x="1697362" y="1104397"/>
+            <a:ext cx="8967868" cy="5650086"/>
+          </a:xfrm>
+          <a:prstGeom prst="rect">
+            <a:avLst/>
+          </a:prstGeom>
+        </p:spPr>
+      </p:pic>
+    </p:spTree>
+    <p:extLst>
+      <p:ext uri="{BB962C8B-B14F-4D97-AF65-F5344CB8AC3E}">
+        <p14:creationId xmlns:p14="http://schemas.microsoft.com/office/powerpoint/2010/main" val="323759229"/>
+      </p:ext>
+    </p:extLst>
+  </p:cSld>
+  <p:clrMapOvr>
+    <a:masterClrMapping/>
+  </p:clrMapOvr>
+</p:sld>
+</file>
+
+<file path=ppt/slides/slide18.xml><?xml version="1.0" encoding="utf-8"?>
+<p:sld xmlns:a="http://schemas.openxmlformats.org/drawingml/2006/main" xmlns:r="http://schemas.openxmlformats.org/officeDocument/2006/relationships" xmlns:p="http://schemas.openxmlformats.org/presentationml/2006/main">
+  <p:cSld>
+    <p:spTree>
+      <p:nvGrpSpPr>
+        <p:cNvPr id="1" name=""/>
+        <p:cNvGrpSpPr/>
+        <p:nvPr/>
+      </p:nvGrpSpPr>
+      <p:grpSpPr>
+        <a:xfrm>
+          <a:off x="0" y="0"/>
+          <a:ext cx="0" cy="0"/>
+          <a:chOff x="0" y="0"/>
+          <a:chExt cx="0" cy="0"/>
+        </a:xfrm>
+      </p:grpSpPr>
+      <p:sp>
+        <p:nvSpPr>
+          <p:cNvPr id="9" name="Заголовок 1">
+            <a:extLst>
+              <a:ext uri="{FF2B5EF4-FFF2-40B4-BE49-F238E27FC236}">
+                <a16:creationId xmlns:a16="http://schemas.microsoft.com/office/drawing/2014/main" id="{5EA56E4F-4593-F090-BAAA-15835B31863E}"/>
+              </a:ext>
+            </a:extLst>
+          </p:cNvPr>
+          <p:cNvSpPr txBox="1">
+            <a:spLocks/>
+          </p:cNvSpPr>
+          <p:nvPr/>
+        </p:nvSpPr>
+        <p:spPr>
+          <a:xfrm>
+            <a:off x="0" y="297898"/>
+            <a:ext cx="10665230" cy="622932"/>
+          </a:xfrm>
+          <a:prstGeom prst="rect">
+            <a:avLst/>
+          </a:prstGeom>
+          <a:solidFill>
+            <a:schemeClr val="accent1"/>
+          </a:solidFill>
+        </p:spPr>
+        <p:txBody>
+          <a:bodyPr>
+            <a:normAutofit/>
+          </a:bodyPr>
+          <a:lstStyle>
+            <a:lvl1pPr algn="l" defTabSz="914400" rtl="0" eaLnBrk="1" latinLnBrk="0" hangingPunct="1">
+              <a:lnSpc>
+                <a:spcPct val="90000"/>
+              </a:lnSpc>
+              <a:spcBef>
+                <a:spcPct val="0"/>
+              </a:spcBef>
+              <a:buNone/>
+              <a:defRPr sz="3600" kern="1200" spc="-60" baseline="0">
+                <a:solidFill>
+                  <a:srgbClr val="FFFFFF"/>
+                </a:solidFill>
+                <a:latin typeface="+mj-lt"/>
+                <a:ea typeface="+mj-ea"/>
+                <a:cs typeface="+mj-cs"/>
+              </a:defRPr>
+            </a:lvl1pPr>
+          </a:lstStyle>
+          <a:p>
+            <a:r>
+              <a:rPr lang="ru-RU" sz="2800" dirty="0"/>
+              <a:t>Прототипы  </a:t>
+            </a:r>
+            <a:r>
+              <a:rPr lang="en-US" sz="2800" dirty="0"/>
+              <a:t>UI</a:t>
+            </a:r>
+            <a:r>
+              <a:rPr lang="ru-RU" sz="2800" dirty="0"/>
+              <a:t> </a:t>
+            </a:r>
+            <a:r>
+              <a:rPr lang="en-US" sz="2800" dirty="0" err="1"/>
+              <a:t>poehali.dev</a:t>
+            </a:r>
+            <a:endParaRPr lang="ru-RU" sz="2800" dirty="0"/>
+          </a:p>
+        </p:txBody>
+      </p:sp>
+      <p:pic>
+        <p:nvPicPr>
+          <p:cNvPr id="4" name="Рисунок 3">
+            <a:extLst>
+              <a:ext uri="{FF2B5EF4-FFF2-40B4-BE49-F238E27FC236}">
+                <a16:creationId xmlns:a16="http://schemas.microsoft.com/office/drawing/2014/main" id="{601BAA81-6910-8A20-E847-CACB28A2C8E5}"/>
+              </a:ext>
+            </a:extLst>
+          </p:cNvPr>
+          <p:cNvPicPr>
+            <a:picLocks noChangeAspect="1"/>
+          </p:cNvPicPr>
+          <p:nvPr/>
+        </p:nvPicPr>
+        <p:blipFill>
+          <a:blip r:embed="rId2"/>
+          <a:stretch>
+            <a:fillRect/>
+          </a:stretch>
+        </p:blipFill>
+        <p:spPr>
+          <a:xfrm>
+            <a:off x="1654310" y="1061733"/>
+            <a:ext cx="9010920" cy="5665212"/>
+          </a:xfrm>
+          <a:prstGeom prst="rect">
+            <a:avLst/>
+          </a:prstGeom>
+        </p:spPr>
+      </p:pic>
+    </p:spTree>
+    <p:extLst>
+      <p:ext uri="{BB962C8B-B14F-4D97-AF65-F5344CB8AC3E}">
+        <p14:creationId xmlns:p14="http://schemas.microsoft.com/office/powerpoint/2010/main" val="1048444784"/>
+      </p:ext>
+    </p:extLst>
+  </p:cSld>
+  <p:clrMapOvr>
+    <a:masterClrMapping/>
+  </p:clrMapOvr>
+</p:sld>
+</file>
+
+<file path=ppt/slides/slide19.xml><?xml version="1.0" encoding="utf-8"?>
 <p:sld xmlns:a="http://schemas.openxmlformats.org/drawingml/2006/main" xmlns:r="http://schemas.openxmlformats.org/officeDocument/2006/relationships" xmlns:p="http://schemas.openxmlformats.org/presentationml/2006/main">
   <p:cSld>
     <p:spTree>

--- a/Презентация/АэроМонитор.pptx
+++ b/Презентация/АэроМонитор.pptx
@@ -4799,6 +4799,50 @@
           </a:p>
         </p:txBody>
       </p:sp>
+      <p:sp>
+        <p:nvSpPr>
+          <p:cNvPr id="6" name="TextBox 5">
+            <a:extLst>
+              <a:ext uri="{FF2B5EF4-FFF2-40B4-BE49-F238E27FC236}">
+                <a16:creationId xmlns:a16="http://schemas.microsoft.com/office/drawing/2014/main" id="{E456B1B0-835E-8E1E-CF55-04F560AC758F}"/>
+              </a:ext>
+            </a:extLst>
+          </p:cNvPr>
+          <p:cNvSpPr txBox="1"/>
+          <p:nvPr/>
+        </p:nvSpPr>
+        <p:spPr>
+          <a:xfrm>
+            <a:off x="3649287" y="2350164"/>
+            <a:ext cx="7797338" cy="369332"/>
+          </a:xfrm>
+          <a:prstGeom prst="rect">
+            <a:avLst/>
+          </a:prstGeom>
+          <a:noFill/>
+        </p:spPr>
+        <p:txBody>
+          <a:bodyPr wrap="square" rtlCol="0">
+            <a:spAutoFit/>
+          </a:bodyPr>
+          <a:lstStyle/>
+          <a:p>
+            <a:pPr marL="285750" indent="-285750">
+              <a:buFont typeface="Arial" panose="020B0604020202020204" pitchFamily="34" charset="0"/>
+              <a:buChar char="•"/>
+            </a:pPr>
+            <a:r>
+              <a:rPr lang="ru-RU" b="1" dirty="0">
+                <a:latin typeface="Consolas" panose="020B0609020204030204" pitchFamily="49" charset="0"/>
+              </a:rPr>
+              <a:t>Метрики</a:t>
+            </a:r>
+            <a:endParaRPr lang="ru-RU" sz="1600" dirty="0">
+              <a:latin typeface="YS Geo"/>
+            </a:endParaRPr>
+          </a:p>
+        </p:txBody>
+      </p:sp>
     </p:spTree>
     <p:extLst>
       <p:ext uri="{BB962C8B-B14F-4D97-AF65-F5344CB8AC3E}">
@@ -6037,7 +6081,13 @@
             </a:r>
             <a:r>
               <a:rPr lang="ru-RU" dirty="0"/>
-              <a:t> минимизация ручного управления, снижение нагрузки на персонал</a:t>
+              <a:t> минимизация ручного управления, снижение нагрузки </a:t>
+            </a:r>
+          </a:p>
+          <a:p>
+            <a:r>
+              <a:rPr lang="ru-RU" dirty="0"/>
+              <a:t>      на персонал</a:t>
             </a:r>
             <a:endParaRPr lang="ru-RU" sz="1600" dirty="0">
               <a:latin typeface="YS Geo"/>

--- a/Презентация/АэроМонитор.pptx
+++ b/Презентация/АэроМонитор.pptx
@@ -355,7 +355,7 @@
             <a:fld id="{5586B75A-687E-405C-8A0B-8D00578BA2C3}" type="datetimeFigureOut">
               <a:rPr lang="en-US" dirty="0"/>
               <a:pPr/>
-              <a:t>4/14/2026</a:t>
+              <a:t>4/15/2026</a:t>
             </a:fld>
             <a:endParaRPr lang="en-US" dirty="0"/>
           </a:p>
@@ -522,7 +522,7 @@
             <a:fld id="{5586B75A-687E-405C-8A0B-8D00578BA2C3}" type="datetimeFigureOut">
               <a:rPr lang="en-US" dirty="0"/>
               <a:pPr/>
-              <a:t>4/14/2026</a:t>
+              <a:t>4/15/2026</a:t>
             </a:fld>
             <a:endParaRPr lang="en-US" dirty="0"/>
           </a:p>
@@ -699,7 +699,7 @@
             <a:fld id="{5586B75A-687E-405C-8A0B-8D00578BA2C3}" type="datetimeFigureOut">
               <a:rPr lang="en-US" dirty="0"/>
               <a:pPr/>
-              <a:t>4/14/2026</a:t>
+              <a:t>4/15/2026</a:t>
             </a:fld>
             <a:endParaRPr lang="en-US" dirty="0"/>
           </a:p>
@@ -866,7 +866,7 @@
             <a:fld id="{5586B75A-687E-405C-8A0B-8D00578BA2C3}" type="datetimeFigureOut">
               <a:rPr lang="en-US" dirty="0"/>
               <a:pPr/>
-              <a:t>4/14/2026</a:t>
+              <a:t>4/15/2026</a:t>
             </a:fld>
             <a:endParaRPr lang="en-US" dirty="0"/>
           </a:p>
@@ -1121,7 +1121,7 @@
             <a:fld id="{5586B75A-687E-405C-8A0B-8D00578BA2C3}" type="datetimeFigureOut">
               <a:rPr lang="en-US" dirty="0"/>
               <a:pPr/>
-              <a:t>4/14/2026</a:t>
+              <a:t>4/15/2026</a:t>
             </a:fld>
             <a:endParaRPr lang="en-US" dirty="0"/>
           </a:p>
@@ -1406,7 +1406,7 @@
             <a:fld id="{5586B75A-687E-405C-8A0B-8D00578BA2C3}" type="datetimeFigureOut">
               <a:rPr lang="en-US" dirty="0"/>
               <a:pPr/>
-              <a:t>4/14/2026</a:t>
+              <a:t>4/15/2026</a:t>
             </a:fld>
             <a:endParaRPr lang="en-US" dirty="0"/>
           </a:p>
@@ -1845,7 +1845,7 @@
             <a:fld id="{5586B75A-687E-405C-8A0B-8D00578BA2C3}" type="datetimeFigureOut">
               <a:rPr lang="en-US" dirty="0"/>
               <a:pPr/>
-              <a:t>4/14/2026</a:t>
+              <a:t>4/15/2026</a:t>
             </a:fld>
             <a:endParaRPr lang="en-US" dirty="0"/>
           </a:p>
@@ -1960,7 +1960,7 @@
             <a:fld id="{5586B75A-687E-405C-8A0B-8D00578BA2C3}" type="datetimeFigureOut">
               <a:rPr lang="en-US" dirty="0"/>
               <a:pPr/>
-              <a:t>4/14/2026</a:t>
+              <a:t>4/15/2026</a:t>
             </a:fld>
             <a:endParaRPr lang="en-US" dirty="0"/>
           </a:p>
@@ -2052,7 +2052,7 @@
             <a:fld id="{5586B75A-687E-405C-8A0B-8D00578BA2C3}" type="datetimeFigureOut">
               <a:rPr lang="en-US" dirty="0"/>
               <a:pPr/>
-              <a:t>4/14/2026</a:t>
+              <a:t>4/15/2026</a:t>
             </a:fld>
             <a:endParaRPr lang="en-US" dirty="0"/>
           </a:p>
@@ -2337,7 +2337,7 @@
             <a:fld id="{5586B75A-687E-405C-8A0B-8D00578BA2C3}" type="datetimeFigureOut">
               <a:rPr lang="en-US" dirty="0"/>
               <a:pPr/>
-              <a:t>4/14/2026</a:t>
+              <a:t>4/15/2026</a:t>
             </a:fld>
             <a:endParaRPr lang="en-US" dirty="0"/>
           </a:p>
@@ -2607,7 +2607,7 @@
             <a:fld id="{5586B75A-687E-405C-8A0B-8D00578BA2C3}" type="datetimeFigureOut">
               <a:rPr lang="en-US" dirty="0"/>
               <a:pPr/>
-              <a:t>4/14/2026</a:t>
+              <a:t>4/15/2026</a:t>
             </a:fld>
             <a:endParaRPr lang="en-US" dirty="0"/>
           </a:p>
@@ -2901,7 +2901,7 @@
             <a:fld id="{5586B75A-687E-405C-8A0B-8D00578BA2C3}" type="datetimeFigureOut">
               <a:rPr lang="en-US" dirty="0"/>
               <a:pPr/>
-              <a:t>4/14/2026</a:t>
+              <a:t>4/15/2026</a:t>
             </a:fld>
             <a:endParaRPr lang="en-US" dirty="0"/>
           </a:p>
@@ -4770,50 +4770,6 @@
         <p:spPr>
           <a:xfrm>
             <a:off x="3649287" y="872836"/>
-            <a:ext cx="7797338" cy="1477328"/>
-          </a:xfrm>
-          <a:prstGeom prst="rect">
-            <a:avLst/>
-          </a:prstGeom>
-          <a:noFill/>
-        </p:spPr>
-        <p:txBody>
-          <a:bodyPr wrap="square" rtlCol="0">
-            <a:spAutoFit/>
-          </a:bodyPr>
-          <a:lstStyle/>
-          <a:p>
-            <a:pPr marL="285750" indent="-285750">
-              <a:buFont typeface="Arial" panose="020B0604020202020204" pitchFamily="34" charset="0"/>
-              <a:buChar char="•"/>
-            </a:pPr>
-            <a:r>
-              <a:rPr lang="ru-RU" b="1" dirty="0">
-                <a:latin typeface="Consolas" panose="020B0609020204030204" pitchFamily="49" charset="0"/>
-              </a:rPr>
-              <a:t>Где взять данные? Опытная эксплуатация и сбор данных с датчиков или случайная генерация с последующей классификацией на неразмеченных данных с привязкой к формуле связывающей все предикторы (стандарты ВОЗ, ГОСТ и др.)?</a:t>
-            </a:r>
-            <a:endParaRPr lang="ru-RU" sz="1600" dirty="0">
-              <a:latin typeface="YS Geo"/>
-            </a:endParaRPr>
-          </a:p>
-        </p:txBody>
-      </p:sp>
-      <p:sp>
-        <p:nvSpPr>
-          <p:cNvPr id="6" name="TextBox 5">
-            <a:extLst>
-              <a:ext uri="{FF2B5EF4-FFF2-40B4-BE49-F238E27FC236}">
-                <a16:creationId xmlns:a16="http://schemas.microsoft.com/office/drawing/2014/main" id="{E456B1B0-835E-8E1E-CF55-04F560AC758F}"/>
-              </a:ext>
-            </a:extLst>
-          </p:cNvPr>
-          <p:cNvSpPr txBox="1"/>
-          <p:nvPr/>
-        </p:nvSpPr>
-        <p:spPr>
-          <a:xfrm>
-            <a:off x="3649287" y="2350164"/>
             <a:ext cx="7797338" cy="369332"/>
           </a:xfrm>
           <a:prstGeom prst="rect">
@@ -4832,10 +4788,10 @@
               <a:buChar char="•"/>
             </a:pPr>
             <a:r>
-              <a:rPr lang="ru-RU" b="1" dirty="0">
+              <a:rPr lang="ru-RU" b="1" dirty="0" smtClean="0">
                 <a:latin typeface="Consolas" panose="020B0609020204030204" pitchFamily="49" charset="0"/>
               </a:rPr>
-              <a:t>Метрики</a:t>
+              <a:t>Генерация синтетических данных</a:t>
             </a:r>
             <a:endParaRPr lang="ru-RU" sz="1600" dirty="0">
               <a:latin typeface="YS Geo"/>
@@ -5320,7 +5276,28 @@
                 <a:effectLst/>
                 <a:latin typeface="YS Geo"/>
               </a:rPr>
-              <a:t> — в занятых помещениях может быть высокий уровень CO₂ и загрязнителей, а в незанятых — избыточный приток свежего воздуха</a:t>
+              <a:t> — в занятых помещениях может быть высокий уровень CO₂ и загрязнителей, а в </a:t>
+            </a:r>
+            <a:endParaRPr lang="ru-RU" sz="1600" b="0" i="0" dirty="0" smtClean="0">
+              <a:effectLst/>
+              <a:latin typeface="YS Geo"/>
+            </a:endParaRPr>
+          </a:p>
+          <a:p>
+            <a:pPr algn="l"/>
+            <a:r>
+              <a:rPr lang="ru-RU" sz="1600" b="0" i="0" dirty="0" smtClean="0">
+                <a:effectLst/>
+                <a:latin typeface="YS Geo"/>
+              </a:rPr>
+              <a:t>незанятых</a:t>
+            </a:r>
+            <a:r>
+              <a:rPr lang="ru-RU" sz="1600" b="0" i="0" dirty="0">
+                <a:effectLst/>
+                <a:latin typeface="YS Geo"/>
+              </a:rPr>
+              <a:t> — избыточный приток свежего воздуха</a:t>
             </a:r>
           </a:p>
           <a:p>
@@ -5676,8 +5653,17 @@
               <a:rPr lang="ru-RU" b="1" dirty="0">
                 <a:latin typeface="Consolas" panose="020B0609020204030204" pitchFamily="49" charset="0"/>
               </a:rPr>
-              <a:t>за счёт точечного управления. </a:t>
-            </a:r>
+              <a:t>за счёт точечного </a:t>
+            </a:r>
+            <a:r>
+              <a:rPr lang="ru-RU" b="1" dirty="0" smtClean="0">
+                <a:latin typeface="Consolas" panose="020B0609020204030204" pitchFamily="49" charset="0"/>
+              </a:rPr>
+              <a:t>управления и прогнозирования. </a:t>
+            </a:r>
+            <a:endParaRPr lang="ru-RU" b="1" dirty="0">
+              <a:latin typeface="Consolas" panose="020B0609020204030204" pitchFamily="49" charset="0"/>
+            </a:endParaRPr>
           </a:p>
           <a:p>
             <a:r>
@@ -6702,7 +6688,7 @@
         <p:spPr>
           <a:xfrm>
             <a:off x="3636740" y="2516487"/>
-            <a:ext cx="7936301" cy="2308324"/>
+            <a:ext cx="7936301" cy="2062103"/>
           </a:xfrm>
           <a:prstGeom prst="rect">
             <a:avLst/>
@@ -6719,73 +6705,225 @@
               <a:rPr lang="ru-RU" sz="1600" dirty="0">
                 <a:latin typeface="YS Geo"/>
               </a:rPr>
-              <a:t>Если внедрить автоматизированную систему контроля качества воздуха с </a:t>
-            </a:r>
-          </a:p>
-          <a:p>
+              <a:t>Если внедрить </a:t>
+            </a:r>
+            <a:r>
+              <a:rPr lang="ru-RU" sz="1600" dirty="0" smtClean="0">
+                <a:latin typeface="YS Geo"/>
+              </a:rPr>
+              <a:t>адаптивную, интеллектуальную</a:t>
+            </a:r>
             <a:r>
               <a:rPr lang="ru-RU" sz="1600" dirty="0">
                 <a:latin typeface="YS Geo"/>
               </a:rPr>
-              <a:t>ML‑моделью для управления приточно‑вытяжной вентиляцией в больших </a:t>
-            </a:r>
-          </a:p>
-          <a:p>
+              <a:t> систему контроля качества </a:t>
+            </a:r>
+            <a:endParaRPr lang="ru-RU" sz="1600" dirty="0" smtClean="0">
+              <a:latin typeface="YS Geo"/>
+            </a:endParaRPr>
+          </a:p>
+          <a:p>
+            <a:r>
+              <a:rPr lang="ru-RU" sz="1600" dirty="0" smtClean="0">
+                <a:latin typeface="YS Geo"/>
+              </a:rPr>
+              <a:t>воздуха</a:t>
+            </a:r>
             <a:r>
               <a:rPr lang="ru-RU" sz="1600" dirty="0">
                 <a:latin typeface="YS Geo"/>
               </a:rPr>
-              <a:t>зданиях, то можно сократить энергопотребление на 25–40 % по сравнению </a:t>
-            </a:r>
-          </a:p>
-          <a:p>
+              <a:t> с </a:t>
+            </a:r>
+            <a:r>
+              <a:rPr lang="ru-RU" sz="1600" dirty="0" smtClean="0">
+                <a:latin typeface="YS Geo"/>
+              </a:rPr>
+              <a:t>ML‑моделью,</a:t>
+            </a:r>
             <a:r>
               <a:rPr lang="ru-RU" sz="1600" dirty="0">
                 <a:latin typeface="YS Geo"/>
               </a:rPr>
-              <a:t>с традиционной круглосуточной вентиляцией и улучшить качество воздуха </a:t>
-            </a:r>
-          </a:p>
-          <a:p>
+              <a:t> для управления приточно‑вытяжной вентиляцией в </a:t>
+            </a:r>
+            <a:endParaRPr lang="ru-RU" sz="1600" dirty="0" smtClean="0">
+              <a:latin typeface="YS Geo"/>
+            </a:endParaRPr>
+          </a:p>
+          <a:p>
+            <a:r>
+              <a:rPr lang="ru-RU" sz="1600" dirty="0" smtClean="0">
+                <a:latin typeface="YS Geo"/>
+              </a:rPr>
+              <a:t>больших</a:t>
+            </a:r>
             <a:r>
               <a:rPr lang="ru-RU" sz="1600" dirty="0">
                 <a:latin typeface="YS Geo"/>
               </a:rPr>
-              <a:t>там где необходимо, потому что система будет активировать проветривание </a:t>
-            </a:r>
-          </a:p>
-          <a:p>
+              <a:t> </a:t>
+            </a:r>
+            <a:r>
+              <a:rPr lang="ru-RU" sz="1600" dirty="0" smtClean="0">
+                <a:latin typeface="YS Geo"/>
+              </a:rPr>
+              <a:t>зданиях</a:t>
+            </a:r>
             <a:r>
               <a:rPr lang="ru-RU" sz="1600" dirty="0">
                 <a:latin typeface="YS Geo"/>
               </a:rPr>
-              <a:t>только в тех помещениях, где реально зафиксировано ухудшение качества </a:t>
-            </a:r>
-          </a:p>
-          <a:p>
+              <a:t>, то можно сократить энергопотребление на </a:t>
+            </a:r>
+            <a:r>
+              <a:rPr lang="ru-RU" sz="1600" dirty="0" smtClean="0">
+                <a:latin typeface="YS Geo"/>
+              </a:rPr>
+              <a:t>25–40% </a:t>
+            </a:r>
             <a:r>
               <a:rPr lang="ru-RU" sz="1600" dirty="0">
                 <a:latin typeface="YS Geo"/>
               </a:rPr>
-              <a:t>воздуха, а не работать по жёсткому расписанию или круглосуточно, кроме того система будет прогнозировать возможные пики (когда много народа или другой фактор, скажем загрязнение в </a:t>
-            </a:r>
-            <a:r>
-              <a:rPr lang="en-US" sz="1600" dirty="0">
+              <a:t>по сравнению </a:t>
+            </a:r>
+            <a:r>
+              <a:rPr lang="ru-RU" sz="1600" dirty="0" smtClean="0">
                 <a:latin typeface="YS Geo"/>
               </a:rPr>
-              <a:t>n-</a:t>
+              <a:t>с</a:t>
             </a:r>
             <a:r>
               <a:rPr lang="ru-RU" sz="1600" dirty="0">
                 <a:latin typeface="YS Geo"/>
               </a:rPr>
-              <a:t>ом помещении</a:t>
-            </a:r>
-            <a:r>
-              <a:rPr lang="en-US" sz="1600" dirty="0">
+              <a:t> традиционной </a:t>
+            </a:r>
+            <a:r>
+              <a:rPr lang="ru-RU" sz="1600" dirty="0" smtClean="0">
                 <a:latin typeface="YS Geo"/>
               </a:rPr>
-              <a:t>)</a:t>
+              <a:t>круглосуточной, централизованной</a:t>
+            </a:r>
+            <a:r>
+              <a:rPr lang="ru-RU" sz="1600" dirty="0">
+                <a:latin typeface="YS Geo"/>
+              </a:rPr>
+              <a:t> вентиляцией и улучшить качество воздуха </a:t>
+            </a:r>
+            <a:r>
+              <a:rPr lang="ru-RU" sz="1600" dirty="0" smtClean="0">
+                <a:latin typeface="YS Geo"/>
+              </a:rPr>
+              <a:t>там где необходимо</a:t>
+            </a:r>
+            <a:r>
+              <a:rPr lang="ru-RU" sz="1600" dirty="0">
+                <a:latin typeface="YS Geo"/>
+              </a:rPr>
+              <a:t>, потому </a:t>
+            </a:r>
+            <a:r>
+              <a:rPr lang="ru-RU" sz="1600" dirty="0" smtClean="0">
+                <a:latin typeface="YS Geo"/>
+              </a:rPr>
+              <a:t>что</a:t>
+            </a:r>
+            <a:r>
+              <a:rPr lang="ru-RU" sz="1600" dirty="0">
+                <a:latin typeface="YS Geo"/>
+              </a:rPr>
+              <a:t> система </a:t>
+            </a:r>
+            <a:r>
+              <a:rPr lang="ru-RU" sz="1600" dirty="0" smtClean="0">
+                <a:latin typeface="YS Geo"/>
+              </a:rPr>
+              <a:t>будет</a:t>
+            </a:r>
+            <a:r>
+              <a:rPr lang="ru-RU" sz="1600" dirty="0">
+                <a:latin typeface="YS Geo"/>
+              </a:rPr>
+              <a:t> </a:t>
+            </a:r>
+            <a:endParaRPr lang="ru-RU" sz="1600" dirty="0" smtClean="0">
+              <a:latin typeface="YS Geo"/>
+            </a:endParaRPr>
+          </a:p>
+          <a:p>
+            <a:r>
+              <a:rPr lang="ru-RU" sz="1600" dirty="0" smtClean="0">
+                <a:latin typeface="YS Geo"/>
+              </a:rPr>
+              <a:t>активировать</a:t>
+            </a:r>
+            <a:r>
+              <a:rPr lang="ru-RU" sz="1600" dirty="0">
+                <a:latin typeface="YS Geo"/>
+              </a:rPr>
+              <a:t> проветривание </a:t>
+            </a:r>
+            <a:r>
+              <a:rPr lang="ru-RU" sz="1600" dirty="0" smtClean="0">
+                <a:latin typeface="YS Geo"/>
+              </a:rPr>
+              <a:t>только</a:t>
+            </a:r>
+            <a:r>
+              <a:rPr lang="ru-RU" sz="1600" dirty="0">
+                <a:latin typeface="YS Geo"/>
+              </a:rPr>
+              <a:t> в тех помещениях, где реально </a:t>
+            </a:r>
+            <a:endParaRPr lang="ru-RU" sz="1600" dirty="0" smtClean="0">
+              <a:latin typeface="YS Geo"/>
+            </a:endParaRPr>
+          </a:p>
+          <a:p>
+            <a:r>
+              <a:rPr lang="ru-RU" sz="1600" dirty="0" smtClean="0">
+                <a:latin typeface="YS Geo"/>
+              </a:rPr>
+              <a:t>зафиксировано</a:t>
+            </a:r>
+            <a:r>
+              <a:rPr lang="ru-RU" sz="1600" dirty="0">
+                <a:latin typeface="YS Geo"/>
+              </a:rPr>
+              <a:t> ухудшение качества </a:t>
+            </a:r>
+            <a:r>
+              <a:rPr lang="ru-RU" sz="1600" dirty="0" smtClean="0">
+                <a:latin typeface="YS Geo"/>
+              </a:rPr>
+              <a:t>воздуха</a:t>
+            </a:r>
+            <a:r>
+              <a:rPr lang="ru-RU" sz="1600" dirty="0">
+                <a:latin typeface="YS Geo"/>
+              </a:rPr>
+              <a:t>, а не работать по </a:t>
+            </a:r>
+            <a:r>
+              <a:rPr lang="ru-RU" sz="1600" dirty="0" smtClean="0">
+                <a:latin typeface="YS Geo"/>
+              </a:rPr>
+              <a:t>всему зданию, жёсткому</a:t>
+            </a:r>
+            <a:r>
+              <a:rPr lang="ru-RU" sz="1600" dirty="0">
+                <a:latin typeface="YS Geo"/>
+              </a:rPr>
+              <a:t> расписанию или </a:t>
+            </a:r>
+            <a:r>
+              <a:rPr lang="ru-RU" sz="1600" dirty="0" smtClean="0">
+                <a:latin typeface="YS Geo"/>
+              </a:rPr>
+              <a:t>круглосуточно </a:t>
             </a:r>
             <a:endParaRPr lang="ru-RU" sz="1600" dirty="0">
               <a:latin typeface="YS Geo"/>
